--- a/material/presentaciones/S10-rag-basico.pptx
+++ b/material/presentaciones/S10-rag-basico.pptx
@@ -765,131 +765,131 @@
             </a:pPr>
             <a:r>
               <a:rPr lang="en-US"/>
-              <a:t>S10 · 01/15 · 18:30. Objetivo del producto.</a:t>
-            </a:r>
-            <a:endParaRPr/>
-          </a:p>
-          <a:p>
-            <a:pPr indent="0" lvl="0" marL="0" rtl="0" algn="l">
-              <a:spcBef>
-                <a:spcPts val="0"/>
-              </a:spcBef>
-              <a:spcAft>
-                <a:spcPts val="0"/>
-              </a:spcAft>
-              <a:buNone/>
-            </a:pPr>
-            <a:r>
-              <a:t/>
-            </a:r>
-            <a:endParaRPr/>
-          </a:p>
-          <a:p>
-            <a:pPr indent="0" lvl="0" marL="0" rtl="0" algn="l">
-              <a:spcBef>
-                <a:spcPts val="0"/>
-              </a:spcBef>
-              <a:spcAft>
-                <a:spcPts val="0"/>
-              </a:spcAft>
-              <a:buNone/>
-            </a:pPr>
-            <a:r>
-              <a:rPr lang="en-US"/>
-              <a:t>Di: el asistente cubre S1 a S20 y a todos los profesores. No es una empresa ficticia ni solo mis clases.</a:t>
-            </a:r>
-            <a:endParaRPr/>
-          </a:p>
-          <a:p>
-            <a:pPr indent="0" lvl="0" marL="0" rtl="0" algn="l">
-              <a:spcBef>
-                <a:spcPts val="0"/>
-              </a:spcBef>
-              <a:spcAft>
-                <a:spcPts val="0"/>
-              </a:spcAft>
-              <a:buNone/>
-            </a:pPr>
-            <a:r>
-              <a:t/>
-            </a:r>
-            <a:endParaRPr/>
-          </a:p>
-          <a:p>
-            <a:pPr indent="0" lvl="0" marL="0" rtl="0" algn="l">
-              <a:spcBef>
-                <a:spcPts val="0"/>
-              </a:spcBef>
-              <a:spcAft>
-                <a:spcPts val="0"/>
-              </a:spcAft>
-              <a:buNone/>
-            </a:pPr>
-            <a:r>
-              <a:rPr lang="en-US"/>
-              <a:t>Señala el diagrama: preguntar, recuperar, citar o rechazar. La app ya está construida; hoy no instalamos el monorepo.</a:t>
-            </a:r>
-            <a:endParaRPr/>
-          </a:p>
-          <a:p>
-            <a:pPr indent="0" lvl="0" marL="0" rtl="0" algn="l">
-              <a:spcBef>
-                <a:spcPts val="0"/>
-              </a:spcBef>
-              <a:spcAft>
-                <a:spcPts val="0"/>
-              </a:spcAft>
-              <a:buNone/>
-            </a:pPr>
-            <a:r>
-              <a:t/>
-            </a:r>
-            <a:endParaRPr/>
-          </a:p>
-          <a:p>
-            <a:pPr indent="0" lvl="0" marL="0" rtl="0" algn="l">
-              <a:spcBef>
-                <a:spcPts val="0"/>
-              </a:spcBef>
-              <a:spcAft>
-                <a:spcPts val="0"/>
-              </a:spcAft>
-              <a:buNone/>
-            </a:pPr>
-            <a:r>
-              <a:rPr lang="en-US"/>
-              <a:t>Abre la diapositiva, no el terminal.</a:t>
-            </a:r>
-            <a:endParaRPr/>
-          </a:p>
-          <a:p>
-            <a:pPr indent="0" lvl="0" marL="0" rtl="0" algn="l">
-              <a:spcBef>
-                <a:spcPts val="0"/>
-              </a:spcBef>
-              <a:spcAft>
-                <a:spcPts val="0"/>
-              </a:spcAft>
-              <a:buNone/>
-            </a:pPr>
-            <a:r>
-              <a:t/>
-            </a:r>
-            <a:endParaRPr/>
-          </a:p>
-          <a:p>
-            <a:pPr indent="0" lvl="0" marL="0" rtl="0" algn="l">
-              <a:spcBef>
-                <a:spcPts val="0"/>
-              </a:spcBef>
-              <a:spcAft>
-                <a:spcPts val="0"/>
-              </a:spcAft>
-              <a:buNone/>
-            </a:pPr>
-            <a:r>
-              <a:rPr lang="en-US"/>
-              <a:t>Adaptación autorizada para esta demo: Vectorize, D1 y R2. S9 sigue enseñando PostgreSQL y pgvector.</a:t>
+              <a:t>S10 · 01/15 · 18:30. Objetivo de la sesión. Presenta el recorrido principal: construir un RAG semántico completo (fragmentación con solapamiento, embeddings, índice vectorial, umbral previo a generar, citas y rechazo) y su laboratorio reproducible en PostgreSQL + pgvector (vector(768) + HNSW) en lab/, acompañado del demostrador del curso AI Engineer en Cloudflare (BGE-M3 1024 d, claude-haiku-5-5).</a:t>
+            </a:r>
+            <a:endParaRPr/>
+          </a:p>
+          <a:p>
+            <a:pPr indent="0" lvl="0" marL="0" rtl="0" algn="l">
+              <a:spcBef>
+                <a:spcPts val="0"/>
+              </a:spcBef>
+              <a:spcAft>
+                <a:spcPts val="0"/>
+              </a:spcAft>
+              <a:buNone/>
+            </a:pPr>
+            <a:r>
+              <a:t/>
+            </a:r>
+            <a:endParaRPr/>
+          </a:p>
+          <a:p>
+            <a:pPr indent="0" lvl="0" marL="0" rtl="0" algn="l">
+              <a:spcBef>
+                <a:spcPts val="0"/>
+              </a:spcBef>
+              <a:spcAft>
+                <a:spcPts val="0"/>
+              </a:spcAft>
+              <a:buNone/>
+            </a:pPr>
+            <a:r>
+              <a:rPr lang="en-US"/>
+              <a:t/>
+            </a:r>
+            <a:endParaRPr/>
+          </a:p>
+          <a:p>
+            <a:pPr indent="0" lvl="0" marL="0" rtl="0" algn="l">
+              <a:spcBef>
+                <a:spcPts val="0"/>
+              </a:spcBef>
+              <a:spcAft>
+                <a:spcPts val="0"/>
+              </a:spcAft>
+              <a:buNone/>
+            </a:pPr>
+            <a:r>
+              <a:t/>
+            </a:r>
+            <a:endParaRPr/>
+          </a:p>
+          <a:p>
+            <a:pPr indent="0" lvl="0" marL="0" rtl="0" algn="l">
+              <a:spcBef>
+                <a:spcPts val="0"/>
+              </a:spcBef>
+              <a:spcAft>
+                <a:spcPts val="0"/>
+              </a:spcAft>
+              <a:buNone/>
+            </a:pPr>
+            <a:r>
+              <a:rPr lang="en-US"/>
+              <a:t/>
+            </a:r>
+            <a:endParaRPr/>
+          </a:p>
+          <a:p>
+            <a:pPr indent="0" lvl="0" marL="0" rtl="0" algn="l">
+              <a:spcBef>
+                <a:spcPts val="0"/>
+              </a:spcBef>
+              <a:spcAft>
+                <a:spcPts val="0"/>
+              </a:spcAft>
+              <a:buNone/>
+            </a:pPr>
+            <a:r>
+              <a:t/>
+            </a:r>
+            <a:endParaRPr/>
+          </a:p>
+          <a:p>
+            <a:pPr indent="0" lvl="0" marL="0" rtl="0" algn="l">
+              <a:spcBef>
+                <a:spcPts val="0"/>
+              </a:spcBef>
+              <a:spcAft>
+                <a:spcPts val="0"/>
+              </a:spcAft>
+              <a:buNone/>
+            </a:pPr>
+            <a:r>
+              <a:rPr lang="en-US"/>
+              <a:t/>
+            </a:r>
+            <a:endParaRPr/>
+          </a:p>
+          <a:p>
+            <a:pPr indent="0" lvl="0" marL="0" rtl="0" algn="l">
+              <a:spcBef>
+                <a:spcPts val="0"/>
+              </a:spcBef>
+              <a:spcAft>
+                <a:spcPts val="0"/>
+              </a:spcAft>
+              <a:buNone/>
+            </a:pPr>
+            <a:r>
+              <a:t/>
+            </a:r>
+            <a:endParaRPr/>
+          </a:p>
+          <a:p>
+            <a:pPr indent="0" lvl="0" marL="0" rtl="0" algn="l">
+              <a:spcBef>
+                <a:spcPts val="0"/>
+              </a:spcBef>
+              <a:spcAft>
+                <a:spcPts val="0"/>
+              </a:spcAft>
+              <a:buNone/>
+            </a:pPr>
+            <a:r>
+              <a:rPr lang="en-US"/>
+              <a:t/>
             </a:r>
             <a:endParaRPr/>
           </a:p>
@@ -1425,116 +1425,116 @@
             </a:pPr>
             <a:r>
               <a:rPr lang="en-US"/>
-              <a:t>S10 · 10/15 · bloque 60–75. Rechazo y cohortes.</a:t>
-            </a:r>
-            <a:endParaRPr/>
-          </a:p>
-          <a:p>
-            <a:pPr indent="0" lvl="0" marL="0" rtl="0" algn="l">
-              <a:spcBef>
-                <a:spcPts val="0"/>
-              </a:spcBef>
-              <a:spcAft>
-                <a:spcPts val="0"/>
-              </a:spcAft>
-              <a:buNone/>
-            </a:pPr>
-            <a:r>
-              <a:t/>
-            </a:r>
-            <a:endParaRPr/>
-          </a:p>
-          <a:p>
-            <a:pPr indent="0" lvl="0" marL="0" rtl="0" algn="l">
-              <a:spcBef>
-                <a:spcPts val="0"/>
-              </a:spcBef>
-              <a:spcAft>
-                <a:spcPts val="0"/>
-              </a:spcAft>
-              <a:buNone/>
-            </a:pPr>
-            <a:r>
-              <a:rPr lang="en-US"/>
-              <a:t>Pregunta: ¿Qué beca interna del año 1991 cubre este programa?</a:t>
-            </a:r>
-            <a:endParaRPr/>
-          </a:p>
-          <a:p>
-            <a:pPr indent="0" lvl="0" marL="0" rtl="0" algn="l">
-              <a:spcBef>
-                <a:spcPts val="0"/>
-              </a:spcBef>
-              <a:spcAft>
-                <a:spcPts val="0"/>
-              </a:spcAft>
-              <a:buNone/>
-            </a:pPr>
-            <a:r>
-              <a:t/>
-            </a:r>
-            <a:endParaRPr/>
-          </a:p>
-          <a:p>
-            <a:pPr indent="0" lvl="0" marL="0" rtl="0" algn="l">
-              <a:spcBef>
-                <a:spcPts val="0"/>
-              </a:spcBef>
-              <a:spcAft>
-                <a:spcPts val="0"/>
-              </a:spcAft>
-              <a:buNone/>
-            </a:pPr>
-            <a:r>
-              <a:rPr lang="en-US"/>
-              <a:t>Debe decir que no hay contexto utilizable y no llamar a un modelo.</a:t>
-            </a:r>
-            <a:endParaRPr/>
-          </a:p>
-          <a:p>
-            <a:pPr indent="0" lvl="0" marL="0" rtl="0" algn="l">
-              <a:spcBef>
-                <a:spcPts val="0"/>
-              </a:spcBef>
-              <a:spcAft>
-                <a:spcPts val="0"/>
-              </a:spcAft>
-              <a:buNone/>
-            </a:pPr>
-            <a:r>
-              <a:t/>
-            </a:r>
-            <a:endParaRPr/>
-          </a:p>
-          <a:p>
-            <a:pPr indent="0" lvl="0" marL="0" rtl="0" algn="l">
-              <a:spcBef>
-                <a:spcPts val="0"/>
-              </a:spcBef>
-              <a:spcAft>
-                <a:spcPts val="0"/>
-              </a:spcAft>
-              <a:buNone/>
-            </a:pPr>
-            <a:r>
-              <a:rPr lang="en-US"/>
-              <a:t>Luego audiencia M/J y la fecha de RAG S10: 2026-10-22.</a:t>
-            </a:r>
-            <a:endParaRPr/>
-          </a:p>
-          <a:p>
-            <a:pPr indent="0" lvl="0" marL="0" rtl="0" algn="l">
-              <a:spcBef>
-                <a:spcPts val="0"/>
-              </a:spcBef>
-              <a:spcAft>
-                <a:spcPts val="0"/>
-              </a:spcAft>
-              <a:buNone/>
-            </a:pPr>
-            <a:r>
-              <a:rPr lang="en-US"/>
-              <a:t>No presentes el 0,33 como umbral semántico.</a:t>
+              <a:t>S10 · 10/15 · bloque 60–75 min. Demostración del rechazo previo a la generación: pregunta por la beca interna de 1991 (en el curso) o por licencias de Windows Server 2025 (en lab/). El control de umbral rechaza sin llamar al modelo generativo (generationCalled: false). Muestra también la aclaración de calendario sin cohorte y el filtro entre M/J (22 de octubre) y L/X (26 de octubre).</a:t>
+            </a:r>
+            <a:endParaRPr/>
+          </a:p>
+          <a:p>
+            <a:pPr indent="0" lvl="0" marL="0" rtl="0" algn="l">
+              <a:spcBef>
+                <a:spcPts val="0"/>
+              </a:spcBef>
+              <a:spcAft>
+                <a:spcPts val="0"/>
+              </a:spcAft>
+              <a:buNone/>
+            </a:pPr>
+            <a:r>
+              <a:t/>
+            </a:r>
+            <a:endParaRPr/>
+          </a:p>
+          <a:p>
+            <a:pPr indent="0" lvl="0" marL="0" rtl="0" algn="l">
+              <a:spcBef>
+                <a:spcPts val="0"/>
+              </a:spcBef>
+              <a:spcAft>
+                <a:spcPts val="0"/>
+              </a:spcAft>
+              <a:buNone/>
+            </a:pPr>
+            <a:r>
+              <a:rPr lang="en-US"/>
+              <a:t/>
+            </a:r>
+            <a:endParaRPr/>
+          </a:p>
+          <a:p>
+            <a:pPr indent="0" lvl="0" marL="0" rtl="0" algn="l">
+              <a:spcBef>
+                <a:spcPts val="0"/>
+              </a:spcBef>
+              <a:spcAft>
+                <a:spcPts val="0"/>
+              </a:spcAft>
+              <a:buNone/>
+            </a:pPr>
+            <a:r>
+              <a:t/>
+            </a:r>
+            <a:endParaRPr/>
+          </a:p>
+          <a:p>
+            <a:pPr indent="0" lvl="0" marL="0" rtl="0" algn="l">
+              <a:spcBef>
+                <a:spcPts val="0"/>
+              </a:spcBef>
+              <a:spcAft>
+                <a:spcPts val="0"/>
+              </a:spcAft>
+              <a:buNone/>
+            </a:pPr>
+            <a:r>
+              <a:rPr lang="en-US"/>
+              <a:t/>
+            </a:r>
+            <a:endParaRPr/>
+          </a:p>
+          <a:p>
+            <a:pPr indent="0" lvl="0" marL="0" rtl="0" algn="l">
+              <a:spcBef>
+                <a:spcPts val="0"/>
+              </a:spcBef>
+              <a:spcAft>
+                <a:spcPts val="0"/>
+              </a:spcAft>
+              <a:buNone/>
+            </a:pPr>
+            <a:r>
+              <a:t/>
+            </a:r>
+            <a:endParaRPr/>
+          </a:p>
+          <a:p>
+            <a:pPr indent="0" lvl="0" marL="0" rtl="0" algn="l">
+              <a:spcBef>
+                <a:spcPts val="0"/>
+              </a:spcBef>
+              <a:spcAft>
+                <a:spcPts val="0"/>
+              </a:spcAft>
+              <a:buNone/>
+            </a:pPr>
+            <a:r>
+              <a:rPr lang="en-US"/>
+              <a:t/>
+            </a:r>
+            <a:endParaRPr/>
+          </a:p>
+          <a:p>
+            <a:pPr indent="0" lvl="0" marL="0" rtl="0" algn="l">
+              <a:spcBef>
+                <a:spcPts val="0"/>
+              </a:spcBef>
+              <a:spcAft>
+                <a:spcPts val="0"/>
+              </a:spcAft>
+              <a:buNone/>
+            </a:pPr>
+            <a:r>
+              <a:rPr lang="en-US"/>
+              <a:t/>
             </a:r>
             <a:endParaRPr/>
           </a:p>
@@ -2354,116 +2354,116 @@
             </a:pPr>
             <a:r>
               <a:rPr lang="en-US"/>
-              <a:t>S10 · 08/15 · inspeccionar antes de generar.</a:t>
-            </a:r>
-            <a:endParaRPr/>
-          </a:p>
-          <a:p>
-            <a:pPr indent="0" lvl="0" marL="0" rtl="0" algn="l">
-              <a:spcBef>
-                <a:spcPts val="0"/>
-              </a:spcBef>
-              <a:spcAft>
-                <a:spcPts val="0"/>
-              </a:spcAft>
-              <a:buNone/>
-            </a:pPr>
-            <a:r>
-              <a:t/>
-            </a:r>
-            <a:endParaRPr/>
-          </a:p>
-          <a:p>
-            <a:pPr indent="0" lvl="0" marL="0" rtl="0" algn="l">
-              <a:spcBef>
-                <a:spcPts val="0"/>
-              </a:spcBef>
-              <a:spcAft>
-                <a:spcPts val="0"/>
-              </a:spcAft>
-              <a:buNone/>
-            </a:pPr>
-            <a:r>
-              <a:rPr lang="en-US"/>
-              <a:t>Señala Traza de la clase: consulta, puntuación, seleccionado o descartado, decisión y generación.</a:t>
-            </a:r>
-            <a:endParaRPr/>
-          </a:p>
-          <a:p>
-            <a:pPr indent="0" lvl="0" marL="0" rtl="0" algn="l">
-              <a:spcBef>
-                <a:spcPts val="0"/>
-              </a:spcBef>
-              <a:spcAft>
-                <a:spcPts val="0"/>
-              </a:spcAft>
-              <a:buNone/>
-            </a:pPr>
-            <a:r>
-              <a:t/>
-            </a:r>
-            <a:endParaRPr/>
-          </a:p>
-          <a:p>
-            <a:pPr indent="0" lvl="0" marL="0" rtl="0" algn="l">
-              <a:spcBef>
-                <a:spcPts val="0"/>
-              </a:spcBef>
-              <a:spcAft>
-                <a:spcPts val="0"/>
-              </a:spcAft>
-              <a:buNone/>
-            </a:pPr>
-            <a:r>
-              <a:rPr lang="en-US"/>
-              <a:t>Comando ya comprobado: bun run dev. Abre la URL que imprime. El 3 de octubre fue http://localhost:5173/.</a:t>
-            </a:r>
-            <a:endParaRPr/>
-          </a:p>
-          <a:p>
-            <a:pPr indent="0" lvl="0" marL="0" rtl="0" algn="l">
-              <a:spcBef>
-                <a:spcPts val="0"/>
-              </a:spcBef>
-              <a:spcAft>
-                <a:spcPts val="0"/>
-              </a:spcAft>
-              <a:buNone/>
-            </a:pPr>
-            <a:r>
-              <a:t/>
-            </a:r>
-            <a:endParaRPr/>
-          </a:p>
-          <a:p>
-            <a:pPr indent="0" lvl="0" marL="0" rtl="0" algn="l">
-              <a:spcBef>
-                <a:spcPts val="0"/>
-              </a:spcBef>
-              <a:spcAft>
-                <a:spcPts val="0"/>
-              </a:spcAft>
-              <a:buNone/>
-            </a:pPr>
-            <a:r>
-              <a:rPr lang="en-US"/>
-              <a:t>Si la app no arranca, abre material/evidencias/ y di la fecha 3 de octubre de 2026, modo demo, perfil fixture.</a:t>
-            </a:r>
-            <a:endParaRPr/>
-          </a:p>
-          <a:p>
-            <a:pPr indent="0" lvl="0" marL="0" rtl="0" algn="l">
-              <a:spcBef>
-                <a:spcPts val="0"/>
-              </a:spcBef>
-              <a:spcAft>
-                <a:spcPts val="0"/>
-              </a:spcAft>
-              <a:buNone/>
-            </a:pPr>
-            <a:r>
-              <a:rPr lang="en-US"/>
-              <a:t>No llames a esas capturas resultado del servicio remoto.</a:t>
+              <a:t>S10 · 08/15 · bloque 25–40 min. Calibración del umbral con ejemplos de validación separados del conjunto de test. En el demostrador con BGE-M3 el corte quedó en 0,50 (scripts/calibrate-live.ts). En el laboratorio pgvector (LAB_VALIDATION_SET, 6 casos), el negativo más alto dio 0,148 y el positivo más bajo 0,250, fijando el corte en similitud &gt;= 0,25 (distancia &lt;=&gt; &lt;= 0,75). Si no supera el corte, se rechaza sin llamar al generador.</a:t>
+            </a:r>
+            <a:endParaRPr/>
+          </a:p>
+          <a:p>
+            <a:pPr indent="0" lvl="0" marL="0" rtl="0" algn="l">
+              <a:spcBef>
+                <a:spcPts val="0"/>
+              </a:spcBef>
+              <a:spcAft>
+                <a:spcPts val="0"/>
+              </a:spcAft>
+              <a:buNone/>
+            </a:pPr>
+            <a:r>
+              <a:t/>
+            </a:r>
+            <a:endParaRPr/>
+          </a:p>
+          <a:p>
+            <a:pPr indent="0" lvl="0" marL="0" rtl="0" algn="l">
+              <a:spcBef>
+                <a:spcPts val="0"/>
+              </a:spcBef>
+              <a:spcAft>
+                <a:spcPts val="0"/>
+              </a:spcAft>
+              <a:buNone/>
+            </a:pPr>
+            <a:r>
+              <a:rPr lang="en-US"/>
+              <a:t/>
+            </a:r>
+            <a:endParaRPr/>
+          </a:p>
+          <a:p>
+            <a:pPr indent="0" lvl="0" marL="0" rtl="0" algn="l">
+              <a:spcBef>
+                <a:spcPts val="0"/>
+              </a:spcBef>
+              <a:spcAft>
+                <a:spcPts val="0"/>
+              </a:spcAft>
+              <a:buNone/>
+            </a:pPr>
+            <a:r>
+              <a:t/>
+            </a:r>
+            <a:endParaRPr/>
+          </a:p>
+          <a:p>
+            <a:pPr indent="0" lvl="0" marL="0" rtl="0" algn="l">
+              <a:spcBef>
+                <a:spcPts val="0"/>
+              </a:spcBef>
+              <a:spcAft>
+                <a:spcPts val="0"/>
+              </a:spcAft>
+              <a:buNone/>
+            </a:pPr>
+            <a:r>
+              <a:rPr lang="en-US"/>
+              <a:t/>
+            </a:r>
+            <a:endParaRPr/>
+          </a:p>
+          <a:p>
+            <a:pPr indent="0" lvl="0" marL="0" rtl="0" algn="l">
+              <a:spcBef>
+                <a:spcPts val="0"/>
+              </a:spcBef>
+              <a:spcAft>
+                <a:spcPts val="0"/>
+              </a:spcAft>
+              <a:buNone/>
+            </a:pPr>
+            <a:r>
+              <a:t/>
+            </a:r>
+            <a:endParaRPr/>
+          </a:p>
+          <a:p>
+            <a:pPr indent="0" lvl="0" marL="0" rtl="0" algn="l">
+              <a:spcBef>
+                <a:spcPts val="0"/>
+              </a:spcBef>
+              <a:spcAft>
+                <a:spcPts val="0"/>
+              </a:spcAft>
+              <a:buNone/>
+            </a:pPr>
+            <a:r>
+              <a:rPr lang="en-US"/>
+              <a:t/>
+            </a:r>
+            <a:endParaRPr/>
+          </a:p>
+          <a:p>
+            <a:pPr indent="0" lvl="0" marL="0" rtl="0" algn="l">
+              <a:spcBef>
+                <a:spcPts val="0"/>
+              </a:spcBef>
+              <a:spcAft>
+                <a:spcPts val="0"/>
+              </a:spcAft>
+              <a:buNone/>
+            </a:pPr>
+            <a:r>
+              <a:rPr lang="en-US"/>
+              <a:t/>
             </a:r>
             <a:endParaRPr/>
           </a:p>
@@ -3283,131 +3283,131 @@
             </a:pPr>
             <a:r>
               <a:rPr lang="en-US"/>
-              <a:t>S10 · 12/15 · bloque 75–80. Ejercicio. 80–90 preguntas.</a:t>
-            </a:r>
-            <a:endParaRPr/>
-          </a:p>
-          <a:p>
-            <a:pPr indent="0" lvl="0" marL="0" rtl="0" algn="l">
-              <a:spcBef>
-                <a:spcPts val="0"/>
-              </a:spcBef>
-              <a:spcAft>
-                <a:spcPts val="0"/>
-              </a:spcAft>
-              <a:buNone/>
-            </a:pPr>
-            <a:r>
-              <a:t/>
-            </a:r>
-            <a:endParaRPr/>
-          </a:p>
-          <a:p>
-            <a:pPr indent="0" lvl="0" marL="0" rtl="0" algn="l">
-              <a:spcBef>
-                <a:spcPts val="0"/>
-              </a:spcBef>
-              <a:spcAft>
-                <a:spcPts val="0"/>
-              </a:spcAft>
-              <a:buNone/>
-            </a:pPr>
-            <a:r>
-              <a:rPr lang="en-US"/>
-              <a:t>Enunciado: material/ejercicios/S10-enunciado.md.</a:t>
-            </a:r>
-            <a:endParaRPr/>
-          </a:p>
-          <a:p>
-            <a:pPr indent="0" lvl="0" marL="0" rtl="0" algn="l">
-              <a:spcBef>
-                <a:spcPts val="0"/>
-              </a:spcBef>
-              <a:spcAft>
-                <a:spcPts val="0"/>
-              </a:spcAft>
-              <a:buNone/>
-            </a:pPr>
-            <a:r>
-              <a:t/>
-            </a:r>
-            <a:endParaRPr/>
-          </a:p>
-          <a:p>
-            <a:pPr indent="0" lvl="0" marL="0" rtl="0" algn="l">
-              <a:spcBef>
-                <a:spcPts val="0"/>
-              </a:spcBef>
-              <a:spcAft>
-                <a:spcPts val="0"/>
-              </a:spcAft>
-              <a:buNone/>
-            </a:pPr>
-            <a:r>
-              <a:rPr lang="en-US"/>
-              <a:t>Distingue cuatro planos: el encargo original y su evaluación de 20 preguntas, la adaptación de esta demo, el laboratorio fixture y el conjunto reservado del profesor, que no se reparte.</a:t>
-            </a:r>
-            <a:endParaRPr/>
-          </a:p>
-          <a:p>
-            <a:pPr indent="0" lvl="0" marL="0" rtl="0" algn="l">
-              <a:spcBef>
-                <a:spcPts val="0"/>
-              </a:spcBef>
-              <a:spcAft>
-                <a:spcPts val="0"/>
-              </a:spcAft>
-              <a:buNone/>
-            </a:pPr>
-            <a:r>
-              <a:t/>
-            </a:r>
-            <a:endParaRPr/>
-          </a:p>
-          <a:p>
-            <a:pPr indent="0" lvl="0" marL="0" rtl="0" algn="l">
-              <a:spcBef>
-                <a:spcPts val="0"/>
-              </a:spcBef>
-              <a:spcAft>
-                <a:spcPts val="0"/>
-              </a:spcAft>
-              <a:buNone/>
-            </a:pPr>
-            <a:r>
-              <a:rPr lang="en-US"/>
-              <a:t>No pidas a los alumnos que paguen Cloudflare ni que desplieguen.</a:t>
-            </a:r>
-            <a:endParaRPr/>
-          </a:p>
-          <a:p>
-            <a:pPr indent="0" lvl="0" marL="0" rtl="0" algn="l">
-              <a:spcBef>
-                <a:spcPts val="0"/>
-              </a:spcBef>
-              <a:spcAft>
-                <a:spcPts val="0"/>
-              </a:spcAft>
-              <a:buNone/>
-            </a:pPr>
-            <a:r>
-              <a:t/>
-            </a:r>
-            <a:endParaRPr/>
-          </a:p>
-          <a:p>
-            <a:pPr indent="0" lvl="0" marL="0" rtl="0" algn="l">
-              <a:spcBef>
-                <a:spcPts val="0"/>
-              </a:spcBef>
-              <a:spcAft>
-                <a:spcPts val="0"/>
-              </a:spcAft>
-              <a:buNone/>
-            </a:pPr>
-            <a:r>
-              <a:rPr lang="en-US"/>
-              <a:t>Cierra anunciando S11, el 27 de octubre, sobre esta misma aplicación.</a:t>
+              <a:t>S10 · 12/15 · bloque 75–80 min. Enunciado publicado de S10 (material/ejercicios/S10-enunciado.md): 8+ documentos ficticios, PostgreSQL + pgvector, vector(768) e índice HNSW, GEN_MODEL_ID y EMBEDDING_MODEL_ID por variables, reconstrucción desde índice vacío, umbral calibrado y evaluación ejecutada de 20 preguntas (14 respondibles y 6 sin respuesta) presentando resultados X/14 y Y/6. El código de apoyo está en lab/.</a:t>
+            </a:r>
+            <a:endParaRPr/>
+          </a:p>
+          <a:p>
+            <a:pPr indent="0" lvl="0" marL="0" rtl="0" algn="l">
+              <a:spcBef>
+                <a:spcPts val="0"/>
+              </a:spcBef>
+              <a:spcAft>
+                <a:spcPts val="0"/>
+              </a:spcAft>
+              <a:buNone/>
+            </a:pPr>
+            <a:r>
+              <a:t/>
+            </a:r>
+            <a:endParaRPr/>
+          </a:p>
+          <a:p>
+            <a:pPr indent="0" lvl="0" marL="0" rtl="0" algn="l">
+              <a:spcBef>
+                <a:spcPts val="0"/>
+              </a:spcBef>
+              <a:spcAft>
+                <a:spcPts val="0"/>
+              </a:spcAft>
+              <a:buNone/>
+            </a:pPr>
+            <a:r>
+              <a:rPr lang="en-US"/>
+              <a:t/>
+            </a:r>
+            <a:endParaRPr/>
+          </a:p>
+          <a:p>
+            <a:pPr indent="0" lvl="0" marL="0" rtl="0" algn="l">
+              <a:spcBef>
+                <a:spcPts val="0"/>
+              </a:spcBef>
+              <a:spcAft>
+                <a:spcPts val="0"/>
+              </a:spcAft>
+              <a:buNone/>
+            </a:pPr>
+            <a:r>
+              <a:t/>
+            </a:r>
+            <a:endParaRPr/>
+          </a:p>
+          <a:p>
+            <a:pPr indent="0" lvl="0" marL="0" rtl="0" algn="l">
+              <a:spcBef>
+                <a:spcPts val="0"/>
+              </a:spcBef>
+              <a:spcAft>
+                <a:spcPts val="0"/>
+              </a:spcAft>
+              <a:buNone/>
+            </a:pPr>
+            <a:r>
+              <a:rPr lang="en-US"/>
+              <a:t/>
+            </a:r>
+            <a:endParaRPr/>
+          </a:p>
+          <a:p>
+            <a:pPr indent="0" lvl="0" marL="0" rtl="0" algn="l">
+              <a:spcBef>
+                <a:spcPts val="0"/>
+              </a:spcBef>
+              <a:spcAft>
+                <a:spcPts val="0"/>
+              </a:spcAft>
+              <a:buNone/>
+            </a:pPr>
+            <a:r>
+              <a:t/>
+            </a:r>
+            <a:endParaRPr/>
+          </a:p>
+          <a:p>
+            <a:pPr indent="0" lvl="0" marL="0" rtl="0" algn="l">
+              <a:spcBef>
+                <a:spcPts val="0"/>
+              </a:spcBef>
+              <a:spcAft>
+                <a:spcPts val="0"/>
+              </a:spcAft>
+              <a:buNone/>
+            </a:pPr>
+            <a:r>
+              <a:rPr lang="en-US"/>
+              <a:t/>
+            </a:r>
+            <a:endParaRPr/>
+          </a:p>
+          <a:p>
+            <a:pPr indent="0" lvl="0" marL="0" rtl="0" algn="l">
+              <a:spcBef>
+                <a:spcPts val="0"/>
+              </a:spcBef>
+              <a:spcAft>
+                <a:spcPts val="0"/>
+              </a:spcAft>
+              <a:buNone/>
+            </a:pPr>
+            <a:r>
+              <a:t/>
+            </a:r>
+            <a:endParaRPr/>
+          </a:p>
+          <a:p>
+            <a:pPr indent="0" lvl="0" marL="0" rtl="0" algn="l">
+              <a:spcBef>
+                <a:spcPts val="0"/>
+              </a:spcBef>
+              <a:spcAft>
+                <a:spcPts val="0"/>
+              </a:spcAft>
+              <a:buNone/>
+            </a:pPr>
+            <a:r>
+              <a:rPr lang="en-US"/>
+              <a:t/>
             </a:r>
             <a:endParaRPr/>
           </a:p>
@@ -3914,131 +3914,131 @@
             </a:pPr>
             <a:r>
               <a:rPr lang="en-US"/>
-              <a:t>Referencia. No la recorras entera si el tiempo se acaba.</a:t>
-            </a:r>
-            <a:endParaRPr/>
-          </a:p>
-          <a:p>
-            <a:pPr indent="0" lvl="0" marL="0" rtl="0" algn="l">
-              <a:spcBef>
-                <a:spcPts val="0"/>
-              </a:spcBef>
-              <a:spcAft>
-                <a:spcPts val="0"/>
-              </a:spcAft>
-              <a:buNone/>
-            </a:pPr>
-            <a:r>
-              <a:t/>
-            </a:r>
-            <a:endParaRPr/>
-          </a:p>
-          <a:p>
-            <a:pPr indent="0" lvl="0" marL="0" rtl="0" algn="l">
-              <a:spcBef>
-                <a:spcPts val="0"/>
-              </a:spcBef>
-              <a:spcAft>
-                <a:spcPts val="0"/>
-              </a:spcAft>
-              <a:buNone/>
-            </a:pPr>
-            <a:r>
-              <a:rPr lang="en-US"/>
-              <a:t>Demo: fixture lexical. Real: Vectorize y OpenRouter, todavía sin dimensión, sin umbral calibrado y sin MODEL_ID.</a:t>
-            </a:r>
-            <a:endParaRPr/>
-          </a:p>
-          <a:p>
-            <a:pPr indent="0" lvl="0" marL="0" rtl="0" algn="l">
-              <a:spcBef>
-                <a:spcPts val="0"/>
-              </a:spcBef>
-              <a:spcAft>
-                <a:spcPts val="0"/>
-              </a:spcAft>
-              <a:buNone/>
-            </a:pPr>
-            <a:r>
-              <a:t/>
-            </a:r>
-            <a:endParaRPr/>
-          </a:p>
-          <a:p>
-            <a:pPr indent="0" lvl="0" marL="0" rtl="0" algn="l">
-              <a:spcBef>
-                <a:spcPts val="0"/>
-              </a:spcBef>
-              <a:spcAft>
-                <a:spcPts val="0"/>
-              </a:spcAft>
-              <a:buNone/>
-            </a:pPr>
-            <a:r>
-              <a:rPr lang="en-US"/>
-              <a:t>Dos ajustes remotos siguen abiertos: el umbral calibrado y la inyección del secreto de OpenRouter.</a:t>
-            </a:r>
-            <a:endParaRPr/>
-          </a:p>
-          <a:p>
-            <a:pPr indent="0" lvl="0" marL="0" rtl="0" algn="l">
-              <a:spcBef>
-                <a:spcPts val="0"/>
-              </a:spcBef>
-              <a:spcAft>
-                <a:spcPts val="0"/>
-              </a:spcAft>
-              <a:buNone/>
-            </a:pPr>
-            <a:r>
-              <a:t/>
-            </a:r>
-            <a:endParaRPr/>
-          </a:p>
-          <a:p>
-            <a:pPr indent="0" lvl="0" marL="0" rtl="0" algn="l">
-              <a:spcBef>
-                <a:spcPts val="0"/>
-              </a:spcBef>
-              <a:spcAft>
-                <a:spcPts val="0"/>
-              </a:spcAft>
-              <a:buNone/>
-            </a:pPr>
-            <a:r>
-              <a:rPr lang="en-US"/>
-              <a:t>Entregar un tope de gasto no basta para declarar probado el camino real.</a:t>
-            </a:r>
-            <a:endParaRPr/>
-          </a:p>
-          <a:p>
-            <a:pPr indent="0" lvl="0" marL="0" rtl="0" algn="l">
-              <a:spcBef>
-                <a:spcPts val="0"/>
-              </a:spcBef>
-              <a:spcAft>
-                <a:spcPts val="0"/>
-              </a:spcAft>
-              <a:buNone/>
-            </a:pPr>
-            <a:r>
-              <a:t/>
-            </a:r>
-            <a:endParaRPr/>
-          </a:p>
-          <a:p>
-            <a:pPr indent="0" lvl="0" marL="0" rtl="0" algn="l">
-              <a:spcBef>
-                <a:spcPts val="0"/>
-              </a:spcBef>
-              <a:spcAft>
-                <a:spcPts val="0"/>
-              </a:spcAft>
-              <a:buNone/>
-            </a:pPr>
-            <a:r>
-              <a:rPr lang="en-US"/>
-              <a:t>Fase 7 verificada en local el 3 de octubre de 2026. Sin alta ni llamada de pago.</a:t>
+              <a:t>S10 · 13/15 · referencia de los tres perfiles. 1) Curso en modo semántico: Vectorize BGE-M3 1024 d (p76509a5f9743), claude-haiku-5-5, corte 0,50 (y variante complete sobre D1). 2) Laboratorio reproducible del ejercicio (lab/): PostgreSQL + pgvector vector(768) + HNSW, 10 documentos de AetherCloud, corte 0,25. 3) Respaldo offline demo: fixture-token-hash-v1 128 d, corte 0,33.</a:t>
+            </a:r>
+            <a:endParaRPr/>
+          </a:p>
+          <a:p>
+            <a:pPr indent="0" lvl="0" marL="0" rtl="0" algn="l">
+              <a:spcBef>
+                <a:spcPts val="0"/>
+              </a:spcBef>
+              <a:spcAft>
+                <a:spcPts val="0"/>
+              </a:spcAft>
+              <a:buNone/>
+            </a:pPr>
+            <a:r>
+              <a:t/>
+            </a:r>
+            <a:endParaRPr/>
+          </a:p>
+          <a:p>
+            <a:pPr indent="0" lvl="0" marL="0" rtl="0" algn="l">
+              <a:spcBef>
+                <a:spcPts val="0"/>
+              </a:spcBef>
+              <a:spcAft>
+                <a:spcPts val="0"/>
+              </a:spcAft>
+              <a:buNone/>
+            </a:pPr>
+            <a:r>
+              <a:rPr lang="en-US"/>
+              <a:t/>
+            </a:r>
+            <a:endParaRPr/>
+          </a:p>
+          <a:p>
+            <a:pPr indent="0" lvl="0" marL="0" rtl="0" algn="l">
+              <a:spcBef>
+                <a:spcPts val="0"/>
+              </a:spcBef>
+              <a:spcAft>
+                <a:spcPts val="0"/>
+              </a:spcAft>
+              <a:buNone/>
+            </a:pPr>
+            <a:r>
+              <a:t/>
+            </a:r>
+            <a:endParaRPr/>
+          </a:p>
+          <a:p>
+            <a:pPr indent="0" lvl="0" marL="0" rtl="0" algn="l">
+              <a:spcBef>
+                <a:spcPts val="0"/>
+              </a:spcBef>
+              <a:spcAft>
+                <a:spcPts val="0"/>
+              </a:spcAft>
+              <a:buNone/>
+            </a:pPr>
+            <a:r>
+              <a:rPr lang="en-US"/>
+              <a:t/>
+            </a:r>
+            <a:endParaRPr/>
+          </a:p>
+          <a:p>
+            <a:pPr indent="0" lvl="0" marL="0" rtl="0" algn="l">
+              <a:spcBef>
+                <a:spcPts val="0"/>
+              </a:spcBef>
+              <a:spcAft>
+                <a:spcPts val="0"/>
+              </a:spcAft>
+              <a:buNone/>
+            </a:pPr>
+            <a:r>
+              <a:t/>
+            </a:r>
+            <a:endParaRPr/>
+          </a:p>
+          <a:p>
+            <a:pPr indent="0" lvl="0" marL="0" rtl="0" algn="l">
+              <a:spcBef>
+                <a:spcPts val="0"/>
+              </a:spcBef>
+              <a:spcAft>
+                <a:spcPts val="0"/>
+              </a:spcAft>
+              <a:buNone/>
+            </a:pPr>
+            <a:r>
+              <a:rPr lang="en-US"/>
+              <a:t/>
+            </a:r>
+            <a:endParaRPr/>
+          </a:p>
+          <a:p>
+            <a:pPr indent="0" lvl="0" marL="0" rtl="0" algn="l">
+              <a:spcBef>
+                <a:spcPts val="0"/>
+              </a:spcBef>
+              <a:spcAft>
+                <a:spcPts val="0"/>
+              </a:spcAft>
+              <a:buNone/>
+            </a:pPr>
+            <a:r>
+              <a:t/>
+            </a:r>
+            <a:endParaRPr/>
+          </a:p>
+          <a:p>
+            <a:pPr indent="0" lvl="0" marL="0" rtl="0" algn="l">
+              <a:spcBef>
+                <a:spcPts val="0"/>
+              </a:spcBef>
+              <a:spcAft>
+                <a:spcPts val="0"/>
+              </a:spcAft>
+              <a:buNone/>
+            </a:pPr>
+            <a:r>
+              <a:rPr lang="en-US"/>
+              <a:t/>
             </a:r>
             <a:endParaRPr/>
           </a:p>
@@ -4574,131 +4574,131 @@
             </a:pPr>
             <a:r>
               <a:rPr lang="en-US"/>
-              <a:t>Referencia de recuperación.</a:t>
-            </a:r>
-            <a:endParaRPr/>
-          </a:p>
-          <a:p>
-            <a:pPr indent="0" lvl="0" marL="0" rtl="0" algn="l">
-              <a:spcBef>
-                <a:spcPts val="0"/>
-              </a:spcBef>
-              <a:spcAft>
-                <a:spcPts val="0"/>
-              </a:spcAft>
-              <a:buNone/>
-            </a:pPr>
-            <a:r>
-              <a:t/>
-            </a:r>
-            <a:endParaRPr/>
-          </a:p>
-          <a:p>
-            <a:pPr indent="0" lvl="0" marL="0" rtl="0" algn="l">
-              <a:spcBef>
-                <a:spcPts val="0"/>
-              </a:spcBef>
-              <a:spcAft>
-                <a:spcPts val="0"/>
-              </a:spcAft>
-              <a:buNone/>
-            </a:pPr>
-            <a:r>
-              <a:rPr lang="en-US"/>
-              <a:t>1. bun run preflight. Lee fuente efectiva y APP_MODE efectivo. Si no es demo, corrige esa fuente: .dev.vars pisa wrangler.jsonc y reiniciar no lo quita. 2. bun run dev y abre la URL impresa. 3. Captura en material/evidencias. 4. Vuelve a la diapositiva. No uses activate --execute.</a:t>
-            </a:r>
-            <a:endParaRPr/>
-          </a:p>
-          <a:p>
-            <a:pPr indent="0" lvl="0" marL="0" rtl="0" algn="l">
-              <a:spcBef>
-                <a:spcPts val="0"/>
-              </a:spcBef>
-              <a:spcAft>
-                <a:spcPts val="0"/>
-              </a:spcAft>
-              <a:buNone/>
-            </a:pPr>
-            <a:r>
-              <a:t/>
-            </a:r>
-            <a:endParaRPr/>
-          </a:p>
-          <a:p>
-            <a:pPr indent="0" lvl="0" marL="0" rtl="0" algn="l">
-              <a:spcBef>
-                <a:spcPts val="0"/>
-              </a:spcBef>
-              <a:spcAft>
-                <a:spcPts val="0"/>
-              </a:spcAft>
-              <a:buNone/>
-            </a:pPr>
-            <a:r>
-              <a:rPr lang="en-US"/>
-              <a:t>bun run activate y bun run activate -- plan salen a 0 y no llaman a la red.</a:t>
-            </a:r>
-            <a:endParaRPr/>
-          </a:p>
-          <a:p>
-            <a:pPr indent="0" lvl="0" marL="0" rtl="0" algn="l">
-              <a:spcBef>
-                <a:spcPts val="0"/>
-              </a:spcBef>
-              <a:spcAft>
-                <a:spcPts val="0"/>
-              </a:spcAft>
-              <a:buNone/>
-            </a:pPr>
-            <a:r>
-              <a:t/>
-            </a:r>
-            <a:endParaRPr/>
-          </a:p>
-          <a:p>
-            <a:pPr indent="0" lvl="0" marL="0" rtl="0" algn="l">
-              <a:spcBef>
-                <a:spcPts val="0"/>
-              </a:spcBef>
-              <a:spcAft>
-                <a:spcPts val="0"/>
-              </a:spcAft>
-              <a:buNone/>
-            </a:pPr>
-            <a:r>
-              <a:rPr lang="en-US"/>
-              <a:t>status --read sí hablaría con la cuenta. No lo uses como plan B de la clase.</a:t>
-            </a:r>
-            <a:endParaRPr/>
-          </a:p>
-          <a:p>
-            <a:pPr indent="0" lvl="0" marL="0" rtl="0" algn="l">
-              <a:spcBef>
-                <a:spcPts val="0"/>
-              </a:spcBef>
-              <a:spcAft>
-                <a:spcPts val="0"/>
-              </a:spcAft>
-              <a:buNone/>
-            </a:pPr>
-            <a:r>
-              <a:t/>
-            </a:r>
-            <a:endParaRPr/>
-          </a:p>
-          <a:p>
-            <a:pPr indent="0" lvl="0" marL="0" rtl="0" algn="l">
-              <a:spcBef>
-                <a:spcPts val="0"/>
-              </a:spcBef>
-              <a:spcAft>
-                <a:spcPts val="0"/>
-              </a:spcAft>
-              <a:buNone/>
-            </a:pPr>
-            <a:r>
-              <a:rPr lang="en-US"/>
-              <a:t>activate --execute sin autorización sale 2 y no abre el puente. No lo fuerces.</a:t>
+              <a:t>S10 · 14/15 · referencia de respaldo local. Si necesitas cambiar a la demo local sin red, comprueba bun run preflight (APP_MODE efectivo: demo) y ejecuta bun run dev o bun run lab:demo. No lances activate --execute en directo.</a:t>
+            </a:r>
+            <a:endParaRPr/>
+          </a:p>
+          <a:p>
+            <a:pPr indent="0" lvl="0" marL="0" rtl="0" algn="l">
+              <a:spcBef>
+                <a:spcPts val="0"/>
+              </a:spcBef>
+              <a:spcAft>
+                <a:spcPts val="0"/>
+              </a:spcAft>
+              <a:buNone/>
+            </a:pPr>
+            <a:r>
+              <a:t/>
+            </a:r>
+            <a:endParaRPr/>
+          </a:p>
+          <a:p>
+            <a:pPr indent="0" lvl="0" marL="0" rtl="0" algn="l">
+              <a:spcBef>
+                <a:spcPts val="0"/>
+              </a:spcBef>
+              <a:spcAft>
+                <a:spcPts val="0"/>
+              </a:spcAft>
+              <a:buNone/>
+            </a:pPr>
+            <a:r>
+              <a:rPr lang="en-US"/>
+              <a:t/>
+            </a:r>
+            <a:endParaRPr/>
+          </a:p>
+          <a:p>
+            <a:pPr indent="0" lvl="0" marL="0" rtl="0" algn="l">
+              <a:spcBef>
+                <a:spcPts val="0"/>
+              </a:spcBef>
+              <a:spcAft>
+                <a:spcPts val="0"/>
+              </a:spcAft>
+              <a:buNone/>
+            </a:pPr>
+            <a:r>
+              <a:t/>
+            </a:r>
+            <a:endParaRPr/>
+          </a:p>
+          <a:p>
+            <a:pPr indent="0" lvl="0" marL="0" rtl="0" algn="l">
+              <a:spcBef>
+                <a:spcPts val="0"/>
+              </a:spcBef>
+              <a:spcAft>
+                <a:spcPts val="0"/>
+              </a:spcAft>
+              <a:buNone/>
+            </a:pPr>
+            <a:r>
+              <a:rPr lang="en-US"/>
+              <a:t/>
+            </a:r>
+            <a:endParaRPr/>
+          </a:p>
+          <a:p>
+            <a:pPr indent="0" lvl="0" marL="0" rtl="0" algn="l">
+              <a:spcBef>
+                <a:spcPts val="0"/>
+              </a:spcBef>
+              <a:spcAft>
+                <a:spcPts val="0"/>
+              </a:spcAft>
+              <a:buNone/>
+            </a:pPr>
+            <a:r>
+              <a:t/>
+            </a:r>
+            <a:endParaRPr/>
+          </a:p>
+          <a:p>
+            <a:pPr indent="0" lvl="0" marL="0" rtl="0" algn="l">
+              <a:spcBef>
+                <a:spcPts val="0"/>
+              </a:spcBef>
+              <a:spcAft>
+                <a:spcPts val="0"/>
+              </a:spcAft>
+              <a:buNone/>
+            </a:pPr>
+            <a:r>
+              <a:rPr lang="en-US"/>
+              <a:t/>
+            </a:r>
+            <a:endParaRPr/>
+          </a:p>
+          <a:p>
+            <a:pPr indent="0" lvl="0" marL="0" rtl="0" algn="l">
+              <a:spcBef>
+                <a:spcPts val="0"/>
+              </a:spcBef>
+              <a:spcAft>
+                <a:spcPts val="0"/>
+              </a:spcAft>
+              <a:buNone/>
+            </a:pPr>
+            <a:r>
+              <a:t/>
+            </a:r>
+            <a:endParaRPr/>
+          </a:p>
+          <a:p>
+            <a:pPr indent="0" lvl="0" marL="0" rtl="0" algn="l">
+              <a:spcBef>
+                <a:spcPts val="0"/>
+              </a:spcBef>
+              <a:spcAft>
+                <a:spcPts val="0"/>
+              </a:spcAft>
+              <a:buNone/>
+            </a:pPr>
+            <a:r>
+              <a:rPr lang="en-US"/>
+              <a:t/>
             </a:r>
             <a:endParaRPr/>
           </a:p>
@@ -5220,100 +5220,100 @@
             </a:pPr>
             <a:r>
               <a:rPr lang="en-US"/>
-              <a:t>S10 · 15/15 · cierre.</a:t>
-            </a:r>
-            <a:endParaRPr/>
-          </a:p>
-          <a:p>
-            <a:pPr indent="0" lvl="0" marL="0" rtl="0" algn="l">
-              <a:spcBef>
-                <a:spcPts val="0"/>
-              </a:spcBef>
-              <a:spcAft>
-                <a:spcPts val="0"/>
-              </a:spcAft>
-              <a:buNone/>
-            </a:pPr>
-            <a:r>
-              <a:t/>
-            </a:r>
-            <a:endParaRPr/>
-          </a:p>
-          <a:p>
-            <a:pPr indent="0" lvl="0" marL="0" rtl="0" algn="l">
-              <a:spcBef>
-                <a:spcPts val="0"/>
-              </a:spcBef>
-              <a:spcAft>
-                <a:spcPts val="0"/>
-              </a:spcAft>
-              <a:buNone/>
-            </a:pPr>
-            <a:r>
-              <a:rPr lang="en-US"/>
-              <a:t>Deja el QR visible. Evalúa S9, no la clase de hoy.</a:t>
-            </a:r>
-            <a:endParaRPr/>
-          </a:p>
-          <a:p>
-            <a:pPr indent="0" lvl="0" marL="0" rtl="0" algn="l">
-              <a:spcBef>
-                <a:spcPts val="0"/>
-              </a:spcBef>
-              <a:spcAft>
-                <a:spcPts val="0"/>
-              </a:spcAft>
-              <a:buNone/>
-            </a:pPr>
-            <a:r>
-              <a:t/>
-            </a:r>
-            <a:endParaRPr/>
-          </a:p>
-          <a:p>
-            <a:pPr indent="0" lvl="0" marL="0" rtl="0" algn="l">
-              <a:spcBef>
-                <a:spcPts val="0"/>
-              </a:spcBef>
-              <a:spcAft>
-                <a:spcPts val="0"/>
-              </a:spcAft>
-              <a:buNone/>
-            </a:pPr>
-            <a:r>
-              <a:rPr lang="en-US"/>
-              <a:t>No envíes ninguna evaluación.</a:t>
-            </a:r>
-            <a:endParaRPr/>
-          </a:p>
-          <a:p>
-            <a:pPr indent="0" lvl="0" marL="0" rtl="0" algn="l">
-              <a:spcBef>
-                <a:spcPts val="0"/>
-              </a:spcBef>
-              <a:spcAft>
-                <a:spcPts val="0"/>
-              </a:spcAft>
-              <a:buNone/>
-            </a:pPr>
-            <a:r>
-              <a:t/>
-            </a:r>
-            <a:endParaRPr/>
-          </a:p>
-          <a:p>
-            <a:pPr indent="0" lvl="0" marL="0" rtl="0" algn="l">
-              <a:spcBef>
-                <a:spcPts val="0"/>
-              </a:spcBef>
-              <a:spcAft>
-                <a:spcPts val="0"/>
-              </a:spcAft>
-              <a:buNone/>
-            </a:pPr>
-            <a:r>
-              <a:rPr lang="en-US"/>
-              <a:t>Anuncia S11 el 27 de octubre sobre la misma aplicación.</a:t>
+              <a:t>S10 · 15/15 · cierre y preguntas (80–90 min). Deja el QR visible (evalúa S9). El martes 27 de octubre en S11 evolucionamos este mismo sistema y el laboratorio pgvector hacia Corrective RAG (CRAG).</a:t>
+            </a:r>
+            <a:endParaRPr/>
+          </a:p>
+          <a:p>
+            <a:pPr indent="0" lvl="0" marL="0" rtl="0" algn="l">
+              <a:spcBef>
+                <a:spcPts val="0"/>
+              </a:spcBef>
+              <a:spcAft>
+                <a:spcPts val="0"/>
+              </a:spcAft>
+              <a:buNone/>
+            </a:pPr>
+            <a:r>
+              <a:t/>
+            </a:r>
+            <a:endParaRPr/>
+          </a:p>
+          <a:p>
+            <a:pPr indent="0" lvl="0" marL="0" rtl="0" algn="l">
+              <a:spcBef>
+                <a:spcPts val="0"/>
+              </a:spcBef>
+              <a:spcAft>
+                <a:spcPts val="0"/>
+              </a:spcAft>
+              <a:buNone/>
+            </a:pPr>
+            <a:r>
+              <a:rPr lang="en-US"/>
+              <a:t/>
+            </a:r>
+            <a:endParaRPr/>
+          </a:p>
+          <a:p>
+            <a:pPr indent="0" lvl="0" marL="0" rtl="0" algn="l">
+              <a:spcBef>
+                <a:spcPts val="0"/>
+              </a:spcBef>
+              <a:spcAft>
+                <a:spcPts val="0"/>
+              </a:spcAft>
+              <a:buNone/>
+            </a:pPr>
+            <a:r>
+              <a:t/>
+            </a:r>
+            <a:endParaRPr/>
+          </a:p>
+          <a:p>
+            <a:pPr indent="0" lvl="0" marL="0" rtl="0" algn="l">
+              <a:spcBef>
+                <a:spcPts val="0"/>
+              </a:spcBef>
+              <a:spcAft>
+                <a:spcPts val="0"/>
+              </a:spcAft>
+              <a:buNone/>
+            </a:pPr>
+            <a:r>
+              <a:rPr lang="en-US"/>
+              <a:t/>
+            </a:r>
+            <a:endParaRPr/>
+          </a:p>
+          <a:p>
+            <a:pPr indent="0" lvl="0" marL="0" rtl="0" algn="l">
+              <a:spcBef>
+                <a:spcPts val="0"/>
+              </a:spcBef>
+              <a:spcAft>
+                <a:spcPts val="0"/>
+              </a:spcAft>
+              <a:buNone/>
+            </a:pPr>
+            <a:r>
+              <a:t/>
+            </a:r>
+            <a:endParaRPr/>
+          </a:p>
+          <a:p>
+            <a:pPr indent="0" lvl="0" marL="0" rtl="0" algn="l">
+              <a:spcBef>
+                <a:spcPts val="0"/>
+              </a:spcBef>
+              <a:spcAft>
+                <a:spcPts val="0"/>
+              </a:spcAft>
+              <a:buNone/>
+            </a:pPr>
+            <a:r>
+              <a:rPr lang="en-US"/>
+              <a:t/>
             </a:r>
             <a:endParaRPr/>
           </a:p>
@@ -5880,131 +5880,131 @@
             </a:pPr>
             <a:r>
               <a:rPr lang="en-US"/>
-              <a:t>S10 · 02/15 · dentro de 0–10 min. QR y objetivos.</a:t>
-            </a:r>
-            <a:endParaRPr/>
-          </a:p>
-          <a:p>
-            <a:pPr indent="0" lvl="0" marL="0" rtl="0" algn="l">
-              <a:spcBef>
-                <a:spcPts val="0"/>
-              </a:spcBef>
-              <a:spcAft>
-                <a:spcPts val="0"/>
-              </a:spcAft>
-              <a:buNone/>
-            </a:pPr>
-            <a:r>
-              <a:t/>
-            </a:r>
-            <a:endParaRPr/>
-          </a:p>
-          <a:p>
-            <a:pPr indent="0" lvl="0" marL="0" rtl="0" algn="l">
-              <a:spcBef>
-                <a:spcPts val="0"/>
-              </a:spcBef>
-              <a:spcAft>
-                <a:spcPts val="0"/>
-              </a:spcAft>
-              <a:buNone/>
-            </a:pPr>
-            <a:r>
-              <a:rPr lang="en-US"/>
-              <a:t>Di: este QR evalúa S9, la clase M/J del 20 de octubre. No envía la práctica de hoy.</a:t>
-            </a:r>
-            <a:endParaRPr/>
-          </a:p>
-          <a:p>
-            <a:pPr indent="0" lvl="0" marL="0" rtl="0" algn="l">
-              <a:spcBef>
-                <a:spcPts val="0"/>
-              </a:spcBef>
-              <a:spcAft>
-                <a:spcPts val="0"/>
-              </a:spcAft>
-              <a:buNone/>
-            </a:pPr>
-            <a:r>
-              <a:t/>
-            </a:r>
-            <a:endParaRPr/>
-          </a:p>
-          <a:p>
-            <a:pPr indent="0" lvl="0" marL="0" rtl="0" algn="l">
-              <a:spcBef>
-                <a:spcPts val="0"/>
-              </a:spcBef>
-              <a:spcAft>
-                <a:spcPts val="0"/>
-              </a:spcAft>
-              <a:buNone/>
-            </a:pPr>
-            <a:r>
-              <a:rPr lang="en-US"/>
-              <a:t>Destino del QR: formulario de feedback de AI Engineer. No inventes otra URL.</a:t>
-            </a:r>
-            <a:endParaRPr/>
-          </a:p>
-          <a:p>
-            <a:pPr indent="0" lvl="0" marL="0" rtl="0" algn="l">
-              <a:spcBef>
-                <a:spcPts val="0"/>
-              </a:spcBef>
-              <a:spcAft>
-                <a:spcPts val="0"/>
-              </a:spcAft>
-              <a:buNone/>
-            </a:pPr>
-            <a:r>
-              <a:t/>
-            </a:r>
-            <a:endParaRPr/>
-          </a:p>
-          <a:p>
-            <a:pPr indent="0" lvl="0" marL="0" rtl="0" algn="l">
-              <a:spcBef>
-                <a:spcPts val="0"/>
-              </a:spcBef>
-              <a:spcAft>
-                <a:spcPts val="0"/>
-              </a:spcAft>
-              <a:buNone/>
-            </a:pPr>
-            <a:r>
-              <a:rPr lang="en-US"/>
-              <a:t>Hoy: sin RAG, corpus, una búsqueda, citas, rechazo y cohorte.</a:t>
-            </a:r>
-            <a:endParaRPr/>
-          </a:p>
-          <a:p>
-            <a:pPr indent="0" lvl="0" marL="0" rtl="0" algn="l">
-              <a:spcBef>
-                <a:spcPts val="0"/>
-              </a:spcBef>
-              <a:spcAft>
-                <a:spcPts val="0"/>
-              </a:spcAft>
-              <a:buNone/>
-            </a:pPr>
-            <a:r>
-              <a:t/>
-            </a:r>
-            <a:endParaRPr/>
-          </a:p>
-          <a:p>
-            <a:pPr indent="0" lvl="0" marL="0" rtl="0" algn="l">
-              <a:spcBef>
-                <a:spcPts val="0"/>
-              </a:spcBef>
-              <a:spcAft>
-                <a:spcPts val="0"/>
-              </a:spcAft>
-              <a:buNone/>
-            </a:pPr>
-            <a:r>
-              <a:rPr lang="en-US"/>
-              <a:t>Si el QR no se lee, usa la copia de material/assets/qr-ai-engineer.jpg.</a:t>
+              <a:t>S10 · 02/15 · bloque 0–10 min. QR de AI Engineer: evalúa la sesión anterior (S9, PostgreSQL y pgvector del 20 de octubre). Hoy conectamos directamente con S9 llevando los embeddings a la columna vector(768) con índice HNSW y añadiendo selección de contexto, umbral calibrado, citas y evaluación 14+6.</a:t>
+            </a:r>
+            <a:endParaRPr/>
+          </a:p>
+          <a:p>
+            <a:pPr indent="0" lvl="0" marL="0" rtl="0" algn="l">
+              <a:spcBef>
+                <a:spcPts val="0"/>
+              </a:spcBef>
+              <a:spcAft>
+                <a:spcPts val="0"/>
+              </a:spcAft>
+              <a:buNone/>
+            </a:pPr>
+            <a:r>
+              <a:t/>
+            </a:r>
+            <a:endParaRPr/>
+          </a:p>
+          <a:p>
+            <a:pPr indent="0" lvl="0" marL="0" rtl="0" algn="l">
+              <a:spcBef>
+                <a:spcPts val="0"/>
+              </a:spcBef>
+              <a:spcAft>
+                <a:spcPts val="0"/>
+              </a:spcAft>
+              <a:buNone/>
+            </a:pPr>
+            <a:r>
+              <a:rPr lang="en-US"/>
+              <a:t/>
+            </a:r>
+            <a:endParaRPr/>
+          </a:p>
+          <a:p>
+            <a:pPr indent="0" lvl="0" marL="0" rtl="0" algn="l">
+              <a:spcBef>
+                <a:spcPts val="0"/>
+              </a:spcBef>
+              <a:spcAft>
+                <a:spcPts val="0"/>
+              </a:spcAft>
+              <a:buNone/>
+            </a:pPr>
+            <a:r>
+              <a:t/>
+            </a:r>
+            <a:endParaRPr/>
+          </a:p>
+          <a:p>
+            <a:pPr indent="0" lvl="0" marL="0" rtl="0" algn="l">
+              <a:spcBef>
+                <a:spcPts val="0"/>
+              </a:spcBef>
+              <a:spcAft>
+                <a:spcPts val="0"/>
+              </a:spcAft>
+              <a:buNone/>
+            </a:pPr>
+            <a:r>
+              <a:rPr lang="en-US"/>
+              <a:t/>
+            </a:r>
+            <a:endParaRPr/>
+          </a:p>
+          <a:p>
+            <a:pPr indent="0" lvl="0" marL="0" rtl="0" algn="l">
+              <a:spcBef>
+                <a:spcPts val="0"/>
+              </a:spcBef>
+              <a:spcAft>
+                <a:spcPts val="0"/>
+              </a:spcAft>
+              <a:buNone/>
+            </a:pPr>
+            <a:r>
+              <a:t/>
+            </a:r>
+            <a:endParaRPr/>
+          </a:p>
+          <a:p>
+            <a:pPr indent="0" lvl="0" marL="0" rtl="0" algn="l">
+              <a:spcBef>
+                <a:spcPts val="0"/>
+              </a:spcBef>
+              <a:spcAft>
+                <a:spcPts val="0"/>
+              </a:spcAft>
+              <a:buNone/>
+            </a:pPr>
+            <a:r>
+              <a:rPr lang="en-US"/>
+              <a:t/>
+            </a:r>
+            <a:endParaRPr/>
+          </a:p>
+          <a:p>
+            <a:pPr indent="0" lvl="0" marL="0" rtl="0" algn="l">
+              <a:spcBef>
+                <a:spcPts val="0"/>
+              </a:spcBef>
+              <a:spcAft>
+                <a:spcPts val="0"/>
+              </a:spcAft>
+              <a:buNone/>
+            </a:pPr>
+            <a:r>
+              <a:t/>
+            </a:r>
+            <a:endParaRPr/>
+          </a:p>
+          <a:p>
+            <a:pPr indent="0" lvl="0" marL="0" rtl="0" algn="l">
+              <a:spcBef>
+                <a:spcPts val="0"/>
+              </a:spcBef>
+              <a:spcAft>
+                <a:spcPts val="0"/>
+              </a:spcAft>
+              <a:buNone/>
+            </a:pPr>
+            <a:r>
+              <a:rPr lang="en-US"/>
+              <a:t/>
             </a:r>
             <a:endParaRPr/>
           </a:p>
@@ -6540,162 +6540,162 @@
             </a:pPr>
             <a:r>
               <a:rPr lang="en-US"/>
-              <a:t>S10 · 03/15 · sigue el bloque 0–10.</a:t>
-            </a:r>
-            <a:endParaRPr/>
-          </a:p>
-          <a:p>
-            <a:pPr indent="0" lvl="0" marL="0" rtl="0" algn="l">
-              <a:spcBef>
-                <a:spcPts val="0"/>
-              </a:spcBef>
-              <a:spcAft>
-                <a:spcPts val="0"/>
-              </a:spcAft>
-              <a:buNone/>
-            </a:pPr>
-            <a:r>
-              <a:t/>
-            </a:r>
-            <a:endParaRPr/>
-          </a:p>
-          <a:p>
-            <a:pPr indent="0" lvl="0" marL="0" rtl="0" algn="l">
-              <a:spcBef>
-                <a:spcPts val="0"/>
-              </a:spcBef>
-              <a:spcAft>
-                <a:spcPts val="0"/>
-              </a:spcAft>
-              <a:buNone/>
-            </a:pPr>
-            <a:r>
-              <a:rPr lang="en-US"/>
-              <a:t>Abre la URL que imprime bun run dev. El 3 de octubre fue http://localhost:5173/. Etapa Sin RAG. Audiencia General.</a:t>
-            </a:r>
-            <a:endParaRPr/>
-          </a:p>
-          <a:p>
-            <a:pPr indent="0" lvl="0" marL="0" rtl="0" algn="l">
-              <a:spcBef>
-                <a:spcPts val="0"/>
-              </a:spcBef>
-              <a:spcAft>
-                <a:spcPts val="0"/>
-              </a:spcAft>
-              <a:buNone/>
-            </a:pPr>
-            <a:r>
-              <a:t/>
-            </a:r>
-            <a:endParaRPr/>
-          </a:p>
-          <a:p>
-            <a:pPr indent="0" lvl="0" marL="0" rtl="0" algn="l">
-              <a:spcBef>
-                <a:spcPts val="0"/>
-              </a:spcBef>
-              <a:spcAft>
-                <a:spcPts val="0"/>
-              </a:spcAft>
-              <a:buNone/>
-            </a:pPr>
-            <a:r>
-              <a:rPr lang="en-US"/>
-              <a:t>Escribe: ¿Cómo modela LangGraph un agente con estado y nodos?</a:t>
-            </a:r>
-            <a:endParaRPr/>
-          </a:p>
-          <a:p>
-            <a:pPr indent="0" lvl="0" marL="0" rtl="0" algn="l">
-              <a:spcBef>
-                <a:spcPts val="0"/>
-              </a:spcBef>
-              <a:spcAft>
-                <a:spcPts val="0"/>
-              </a:spcAft>
-              <a:buNone/>
-            </a:pPr>
-            <a:r>
-              <a:t/>
-            </a:r>
-            <a:endParaRPr/>
-          </a:p>
-          <a:p>
-            <a:pPr indent="0" lvl="0" marL="0" rtl="0" algn="l">
-              <a:spcBef>
-                <a:spcPts val="0"/>
-              </a:spcBef>
-              <a:spcAft>
-                <a:spcPts val="0"/>
-              </a:spcAft>
-              <a:buNone/>
-            </a:pPr>
-            <a:r>
-              <a:rPr lang="en-US"/>
-              <a:t>Debe salir un stream offline-demo, sin fuentes. Uso y coste: no medido.</a:t>
-            </a:r>
-            <a:endParaRPr/>
-          </a:p>
-          <a:p>
-            <a:pPr indent="0" lvl="0" marL="0" rtl="0" algn="l">
-              <a:spcBef>
-                <a:spcPts val="0"/>
-              </a:spcBef>
-              <a:spcAft>
-                <a:spcPts val="0"/>
-              </a:spcAft>
-              <a:buNone/>
-            </a:pPr>
-            <a:r>
-              <a:t/>
-            </a:r>
-            <a:endParaRPr/>
-          </a:p>
-          <a:p>
-            <a:pPr indent="0" lvl="0" marL="0" rtl="0" algn="l">
-              <a:spcBef>
-                <a:spcPts val="0"/>
-              </a:spcBef>
-              <a:spcAft>
-                <a:spcPts val="0"/>
-              </a:spcAft>
-              <a:buNone/>
-            </a:pPr>
-            <a:r>
-              <a:rPr lang="en-US"/>
-              <a:t>Di: una respuesta genérica o una abstención serían aceptables. No pidas al modelo que invente para demostrar el fallo.</a:t>
-            </a:r>
-            <a:endParaRPr/>
-          </a:p>
-          <a:p>
-            <a:pPr indent="0" lvl="0" marL="0" rtl="0" algn="l">
-              <a:spcBef>
-                <a:spcPts val="0"/>
-              </a:spcBef>
-              <a:spcAft>
-                <a:spcPts val="0"/>
-              </a:spcAft>
-              <a:buNone/>
-            </a:pPr>
-            <a:r>
-              <a:t/>
-            </a:r>
-            <a:endParaRPr/>
-          </a:p>
-          <a:p>
-            <a:pPr indent="0" lvl="0" marL="0" rtl="0" algn="l">
-              <a:spcBef>
-                <a:spcPts val="0"/>
-              </a:spcBef>
-              <a:spcAft>
-                <a:spcPts val="0"/>
-              </a:spcAft>
-              <a:buNone/>
-            </a:pPr>
-            <a:r>
-              <a:rPr lang="en-US"/>
-              <a:t>En demo ni siquiera hay modelo. No lo presentes como GPT ni como OpenRouter.</a:t>
+              <a:t>S10 · 03/15 · bloque 0–10 min. Etapa Sin RAG. Pregunta por la fecha exacta de S10 en la cohorte M/J o por un detalle específico del programa. Con modelo real (claude-haiku-5-5) se abstiene o responde de forma genérica sin citas; en respaldo demo devuelve el stream etiquetado offline-demo. Señala que uso y coste desconocidos viajan como null, nunca como cero.</a:t>
+            </a:r>
+            <a:endParaRPr/>
+          </a:p>
+          <a:p>
+            <a:pPr indent="0" lvl="0" marL="0" rtl="0" algn="l">
+              <a:spcBef>
+                <a:spcPts val="0"/>
+              </a:spcBef>
+              <a:spcAft>
+                <a:spcPts val="0"/>
+              </a:spcAft>
+              <a:buNone/>
+            </a:pPr>
+            <a:r>
+              <a:t/>
+            </a:r>
+            <a:endParaRPr/>
+          </a:p>
+          <a:p>
+            <a:pPr indent="0" lvl="0" marL="0" rtl="0" algn="l">
+              <a:spcBef>
+                <a:spcPts val="0"/>
+              </a:spcBef>
+              <a:spcAft>
+                <a:spcPts val="0"/>
+              </a:spcAft>
+              <a:buNone/>
+            </a:pPr>
+            <a:r>
+              <a:rPr lang="en-US"/>
+              <a:t/>
+            </a:r>
+            <a:endParaRPr/>
+          </a:p>
+          <a:p>
+            <a:pPr indent="0" lvl="0" marL="0" rtl="0" algn="l">
+              <a:spcBef>
+                <a:spcPts val="0"/>
+              </a:spcBef>
+              <a:spcAft>
+                <a:spcPts val="0"/>
+              </a:spcAft>
+              <a:buNone/>
+            </a:pPr>
+            <a:r>
+              <a:t/>
+            </a:r>
+            <a:endParaRPr/>
+          </a:p>
+          <a:p>
+            <a:pPr indent="0" lvl="0" marL="0" rtl="0" algn="l">
+              <a:spcBef>
+                <a:spcPts val="0"/>
+              </a:spcBef>
+              <a:spcAft>
+                <a:spcPts val="0"/>
+              </a:spcAft>
+              <a:buNone/>
+            </a:pPr>
+            <a:r>
+              <a:rPr lang="en-US"/>
+              <a:t/>
+            </a:r>
+            <a:endParaRPr/>
+          </a:p>
+          <a:p>
+            <a:pPr indent="0" lvl="0" marL="0" rtl="0" algn="l">
+              <a:spcBef>
+                <a:spcPts val="0"/>
+              </a:spcBef>
+              <a:spcAft>
+                <a:spcPts val="0"/>
+              </a:spcAft>
+              <a:buNone/>
+            </a:pPr>
+            <a:r>
+              <a:t/>
+            </a:r>
+            <a:endParaRPr/>
+          </a:p>
+          <a:p>
+            <a:pPr indent="0" lvl="0" marL="0" rtl="0" algn="l">
+              <a:spcBef>
+                <a:spcPts val="0"/>
+              </a:spcBef>
+              <a:spcAft>
+                <a:spcPts val="0"/>
+              </a:spcAft>
+              <a:buNone/>
+            </a:pPr>
+            <a:r>
+              <a:rPr lang="en-US"/>
+              <a:t/>
+            </a:r>
+            <a:endParaRPr/>
+          </a:p>
+          <a:p>
+            <a:pPr indent="0" lvl="0" marL="0" rtl="0" algn="l">
+              <a:spcBef>
+                <a:spcPts val="0"/>
+              </a:spcBef>
+              <a:spcAft>
+                <a:spcPts val="0"/>
+              </a:spcAft>
+              <a:buNone/>
+            </a:pPr>
+            <a:r>
+              <a:t/>
+            </a:r>
+            <a:endParaRPr/>
+          </a:p>
+          <a:p>
+            <a:pPr indent="0" lvl="0" marL="0" rtl="0" algn="l">
+              <a:spcBef>
+                <a:spcPts val="0"/>
+              </a:spcBef>
+              <a:spcAft>
+                <a:spcPts val="0"/>
+              </a:spcAft>
+              <a:buNone/>
+            </a:pPr>
+            <a:r>
+              <a:rPr lang="en-US"/>
+              <a:t/>
+            </a:r>
+            <a:endParaRPr/>
+          </a:p>
+          <a:p>
+            <a:pPr indent="0" lvl="0" marL="0" rtl="0" algn="l">
+              <a:spcBef>
+                <a:spcPts val="0"/>
+              </a:spcBef>
+              <a:spcAft>
+                <a:spcPts val="0"/>
+              </a:spcAft>
+              <a:buNone/>
+            </a:pPr>
+            <a:r>
+              <a:t/>
+            </a:r>
+            <a:endParaRPr/>
+          </a:p>
+          <a:p>
+            <a:pPr indent="0" lvl="0" marL="0" rtl="0" algn="l">
+              <a:spcBef>
+                <a:spcPts val="0"/>
+              </a:spcBef>
+              <a:spcAft>
+                <a:spcPts val="0"/>
+              </a:spcAft>
+              <a:buNone/>
+            </a:pPr>
+            <a:r>
+              <a:rPr lang="en-US"/>
+              <a:t/>
             </a:r>
             <a:endParaRPr/>
           </a:p>
@@ -7200,131 +7200,131 @@
             </a:pPr>
             <a:r>
               <a:rPr lang="en-US"/>
-              <a:t>S10 · 06/15 · fragmentos y embeddings.</a:t>
-            </a:r>
-            <a:endParaRPr/>
-          </a:p>
-          <a:p>
-            <a:pPr indent="0" lvl="0" marL="0" rtl="0" algn="l">
-              <a:spcBef>
-                <a:spcPts val="0"/>
-              </a:spcBef>
-              <a:spcAft>
-                <a:spcPts val="0"/>
-              </a:spcAft>
-              <a:buNone/>
-            </a:pPr>
-            <a:r>
-              <a:t/>
-            </a:r>
-            <a:endParaRPr/>
-          </a:p>
-          <a:p>
-            <a:pPr indent="0" lvl="0" marL="0" rtl="0" algn="l">
-              <a:spcBef>
-                <a:spcPts val="0"/>
-              </a:spcBef>
-              <a:spcAft>
-                <a:spcPts val="0"/>
-              </a:spcAft>
-              <a:buNone/>
-            </a:pPr>
-            <a:r>
-              <a:rPr lang="en-US"/>
-              <a:t>Ejemplo real: c3a59a406888b:s05-langgraph:00.</a:t>
-            </a:r>
-            <a:endParaRPr/>
-          </a:p>
-          <a:p>
-            <a:pPr indent="0" lvl="0" marL="0" rtl="0" algn="l">
-              <a:spcBef>
-                <a:spcPts val="0"/>
-              </a:spcBef>
-              <a:spcAft>
-                <a:spcPts val="0"/>
-              </a:spcAft>
-              <a:buNone/>
-            </a:pPr>
-            <a:r>
-              <a:t/>
-            </a:r>
-            <a:endParaRPr/>
-          </a:p>
-          <a:p>
-            <a:pPr indent="0" lvl="0" marL="0" rtl="0" algn="l">
-              <a:spcBef>
-                <a:spcPts val="0"/>
-              </a:spcBef>
-              <a:spcAft>
-                <a:spcPts val="0"/>
-              </a:spcAft>
-              <a:buNone/>
-            </a:pPr>
-            <a:r>
-              <a:rPr lang="en-US"/>
-              <a:t>vectorIdFor devuelve ese id si cabe en 64 bytes. Está en packages/rag/src/ids.ts.</a:t>
-            </a:r>
-            <a:endParaRPr/>
-          </a:p>
-          <a:p>
-            <a:pPr indent="0" lvl="0" marL="0" rtl="0" algn="l">
-              <a:spcBef>
-                <a:spcPts val="0"/>
-              </a:spcBef>
-              <a:spcAft>
-                <a:spcPts val="0"/>
-              </a:spcAft>
-              <a:buNone/>
-            </a:pPr>
-            <a:r>
-              <a:t/>
-            </a:r>
-            <a:endParaRPr/>
-          </a:p>
-          <a:p>
-            <a:pPr indent="0" lvl="0" marL="0" rtl="0" algn="l">
-              <a:spcBef>
-                <a:spcPts val="0"/>
-              </a:spcBef>
-              <a:spcAft>
-                <a:spcPts val="0"/>
-              </a:spcAft>
-              <a:buNone/>
-            </a:pPr>
-            <a:r>
-              <a:rPr lang="en-US"/>
-              <a:t>El perfil demo es fixture-token-hash-v1, 128 dimensiones, coseno, umbral 0,33.</a:t>
-            </a:r>
-            <a:endParaRPr/>
-          </a:p>
-          <a:p>
-            <a:pPr indent="0" lvl="0" marL="0" rtl="0" algn="l">
-              <a:spcBef>
-                <a:spcPts val="0"/>
-              </a:spcBef>
-              <a:spcAft>
-                <a:spcPts val="0"/>
-              </a:spcAft>
-              <a:buNone/>
-            </a:pPr>
-            <a:r>
-              <a:t/>
-            </a:r>
-            <a:endParaRPr/>
-          </a:p>
-          <a:p>
-            <a:pPr indent="0" lvl="0" marL="0" rtl="0" algn="l">
-              <a:spcBef>
-                <a:spcPts val="0"/>
-              </a:spcBef>
-              <a:spcAft>
-                <a:spcPts val="0"/>
-              </a:spcAft>
-              <a:buNone/>
-            </a:pPr>
-            <a:r>
-              <a:rPr lang="en-US"/>
-              <a:t>Di: 0,33 no es un umbral de BGE-M3. 128 no es la dimensión observada del modelo.</a:t>
+              <a:t>S10 · 06/15 · bloque 10–25 min. Funcionamiento del embedding e índice vectorial. El documento y la pregunta deben usar exactamente el mismo modelo y dimensión (768 en lab/schema.sql con EMBEDDING_MODEL_ID y vector(768) + índice HNSW m=16, ef_construction=64; 1024 en BGE-M3 del demostrador). Explica la escala: en pgvector el operador &lt;=&gt; es distancia coseno en [0, 2] donde menor significa más próximo; 1 - distancia es la similitud coseno.</a:t>
+            </a:r>
+            <a:endParaRPr/>
+          </a:p>
+          <a:p>
+            <a:pPr indent="0" lvl="0" marL="0" rtl="0" algn="l">
+              <a:spcBef>
+                <a:spcPts val="0"/>
+              </a:spcBef>
+              <a:spcAft>
+                <a:spcPts val="0"/>
+              </a:spcAft>
+              <a:buNone/>
+            </a:pPr>
+            <a:r>
+              <a:t/>
+            </a:r>
+            <a:endParaRPr/>
+          </a:p>
+          <a:p>
+            <a:pPr indent="0" lvl="0" marL="0" rtl="0" algn="l">
+              <a:spcBef>
+                <a:spcPts val="0"/>
+              </a:spcBef>
+              <a:spcAft>
+                <a:spcPts val="0"/>
+              </a:spcAft>
+              <a:buNone/>
+            </a:pPr>
+            <a:r>
+              <a:rPr lang="en-US"/>
+              <a:t/>
+            </a:r>
+            <a:endParaRPr/>
+          </a:p>
+          <a:p>
+            <a:pPr indent="0" lvl="0" marL="0" rtl="0" algn="l">
+              <a:spcBef>
+                <a:spcPts val="0"/>
+              </a:spcBef>
+              <a:spcAft>
+                <a:spcPts val="0"/>
+              </a:spcAft>
+              <a:buNone/>
+            </a:pPr>
+            <a:r>
+              <a:t/>
+            </a:r>
+            <a:endParaRPr/>
+          </a:p>
+          <a:p>
+            <a:pPr indent="0" lvl="0" marL="0" rtl="0" algn="l">
+              <a:spcBef>
+                <a:spcPts val="0"/>
+              </a:spcBef>
+              <a:spcAft>
+                <a:spcPts val="0"/>
+              </a:spcAft>
+              <a:buNone/>
+            </a:pPr>
+            <a:r>
+              <a:rPr lang="en-US"/>
+              <a:t/>
+            </a:r>
+            <a:endParaRPr/>
+          </a:p>
+          <a:p>
+            <a:pPr indent="0" lvl="0" marL="0" rtl="0" algn="l">
+              <a:spcBef>
+                <a:spcPts val="0"/>
+              </a:spcBef>
+              <a:spcAft>
+                <a:spcPts val="0"/>
+              </a:spcAft>
+              <a:buNone/>
+            </a:pPr>
+            <a:r>
+              <a:t/>
+            </a:r>
+            <a:endParaRPr/>
+          </a:p>
+          <a:p>
+            <a:pPr indent="0" lvl="0" marL="0" rtl="0" algn="l">
+              <a:spcBef>
+                <a:spcPts val="0"/>
+              </a:spcBef>
+              <a:spcAft>
+                <a:spcPts val="0"/>
+              </a:spcAft>
+              <a:buNone/>
+            </a:pPr>
+            <a:r>
+              <a:rPr lang="en-US"/>
+              <a:t/>
+            </a:r>
+            <a:endParaRPr/>
+          </a:p>
+          <a:p>
+            <a:pPr indent="0" lvl="0" marL="0" rtl="0" algn="l">
+              <a:spcBef>
+                <a:spcPts val="0"/>
+              </a:spcBef>
+              <a:spcAft>
+                <a:spcPts val="0"/>
+              </a:spcAft>
+              <a:buNone/>
+            </a:pPr>
+            <a:r>
+              <a:t/>
+            </a:r>
+            <a:endParaRPr/>
+          </a:p>
+          <a:p>
+            <a:pPr indent="0" lvl="0" marL="0" rtl="0" algn="l">
+              <a:spcBef>
+                <a:spcPts val="0"/>
+              </a:spcBef>
+              <a:spcAft>
+                <a:spcPts val="0"/>
+              </a:spcAft>
+              <a:buNone/>
+            </a:pPr>
+            <a:r>
+              <a:rPr lang="en-US"/>
+              <a:t/>
             </a:r>
             <a:endParaRPr/>
           </a:p>
@@ -7923,131 +7923,131 @@
             </a:pPr>
             <a:r>
               <a:rPr lang="en-US"/>
-              <a:t>S10 · 09/15 · bloque 40–60. Respuesta y citas.</a:t>
-            </a:r>
-            <a:endParaRPr/>
-          </a:p>
-          <a:p>
-            <a:pPr indent="0" lvl="0" marL="0" rtl="0" algn="l">
-              <a:spcBef>
-                <a:spcPts val="0"/>
-              </a:spcBef>
-              <a:spcAft>
-                <a:spcPts val="0"/>
-              </a:spcAft>
-              <a:buNone/>
-            </a:pPr>
-            <a:r>
-              <a:t/>
-            </a:r>
-            <a:endParaRPr/>
-          </a:p>
-          <a:p>
-            <a:pPr indent="0" lvl="0" marL="0" rtl="0" algn="l">
-              <a:spcBef>
-                <a:spcPts val="0"/>
-              </a:spcBef>
-              <a:spcAft>
-                <a:spcPts val="0"/>
-              </a:spcAft>
-              <a:buNone/>
-            </a:pPr>
-            <a:r>
-              <a:rPr lang="en-US"/>
-              <a:t>La respuesta demo empieza por: Respuesta de la canalización local de prueba.</a:t>
-            </a:r>
-            <a:endParaRPr/>
-          </a:p>
-          <a:p>
-            <a:pPr indent="0" lvl="0" marL="0" rtl="0" algn="l">
-              <a:spcBef>
-                <a:spcPts val="0"/>
-              </a:spcBef>
-              <a:spcAft>
-                <a:spcPts val="0"/>
-              </a:spcAft>
-              <a:buNone/>
-            </a:pPr>
-            <a:r>
-              <a:t/>
-            </a:r>
-            <a:endParaRPr/>
-          </a:p>
-          <a:p>
-            <a:pPr indent="0" lvl="0" marL="0" rtl="0" algn="l">
-              <a:spcBef>
-                <a:spcPts val="0"/>
-              </a:spcBef>
-              <a:spcAft>
-                <a:spcPts val="0"/>
-              </a:spcAft>
-              <a:buNone/>
-            </a:pPr>
-            <a:r>
-              <a:rPr lang="en-US"/>
-              <a:t>La cita tiene la forma [cite:id]. El panel Fuentes muestra título, sección, chunkId y corpus.</a:t>
-            </a:r>
-            <a:endParaRPr/>
-          </a:p>
-          <a:p>
-            <a:pPr indent="0" lvl="0" marL="0" rtl="0" algn="l">
-              <a:spcBef>
-                <a:spcPts val="0"/>
-              </a:spcBef>
-              <a:spcAft>
-                <a:spcPts val="0"/>
-              </a:spcAft>
-              <a:buNone/>
-            </a:pPr>
-            <a:r>
-              <a:t/>
-            </a:r>
-            <a:endParaRPr/>
-          </a:p>
-          <a:p>
-            <a:pPr indent="0" lvl="0" marL="0" rtl="0" algn="l">
-              <a:spcBef>
-                <a:spcPts val="0"/>
-              </a:spcBef>
-              <a:spcAft>
-                <a:spcPts val="0"/>
-              </a:spcAft>
-              <a:buNone/>
-            </a:pPr>
-            <a:r>
-              <a:rPr lang="en-US"/>
-              <a:t>Esa cita no sale de un modelo. Es el texto del fragmento recuperado.</a:t>
-            </a:r>
-            <a:endParaRPr/>
-          </a:p>
-          <a:p>
-            <a:pPr indent="0" lvl="0" marL="0" rtl="0" algn="l">
-              <a:spcBef>
-                <a:spcPts val="0"/>
-              </a:spcBef>
-              <a:spcAft>
-                <a:spcPts val="0"/>
-              </a:spcAft>
-              <a:buNone/>
-            </a:pPr>
-            <a:r>
-              <a:t/>
-            </a:r>
-            <a:endParaRPr/>
-          </a:p>
-          <a:p>
-            <a:pPr indent="0" lvl="0" marL="0" rtl="0" algn="l">
-              <a:spcBef>
-                <a:spcPts val="0"/>
-              </a:spcBef>
-              <a:spcAft>
-                <a:spcPts val="0"/>
-              </a:spcAft>
-              <a:buNone/>
-            </a:pPr>
-            <a:r>
-              <a:rPr lang="en-US"/>
-              <a:t>RAG básico hace una sola búsqueda. La reescritura de seguimiento sigue pendiente.</a:t>
+              <a:t>S10 · 09/15 · bloque 40–60 min. Construcción del contexto, bloque DATOS no fiable y validación de citas [cite:id]. Explica que los fragmentos recuperados se envuelven como datos y nunca como instrucciones del sistema. Después de recorrer el RAG semántico, presenta como variante adicional RAG_CONTEXT_MODE=complete (docs/rag-contexto-completo.md): cuando un corpus es muy pequeño (23 KB) cabe entero en D1, aunque no demuestra el filtro por puntuación del ejercicio.</a:t>
+            </a:r>
+            <a:endParaRPr/>
+          </a:p>
+          <a:p>
+            <a:pPr indent="0" lvl="0" marL="0" rtl="0" algn="l">
+              <a:spcBef>
+                <a:spcPts val="0"/>
+              </a:spcBef>
+              <a:spcAft>
+                <a:spcPts val="0"/>
+              </a:spcAft>
+              <a:buNone/>
+            </a:pPr>
+            <a:r>
+              <a:t/>
+            </a:r>
+            <a:endParaRPr/>
+          </a:p>
+          <a:p>
+            <a:pPr indent="0" lvl="0" marL="0" rtl="0" algn="l">
+              <a:spcBef>
+                <a:spcPts val="0"/>
+              </a:spcBef>
+              <a:spcAft>
+                <a:spcPts val="0"/>
+              </a:spcAft>
+              <a:buNone/>
+            </a:pPr>
+            <a:r>
+              <a:rPr lang="en-US"/>
+              <a:t/>
+            </a:r>
+            <a:endParaRPr/>
+          </a:p>
+          <a:p>
+            <a:pPr indent="0" lvl="0" marL="0" rtl="0" algn="l">
+              <a:spcBef>
+                <a:spcPts val="0"/>
+              </a:spcBef>
+              <a:spcAft>
+                <a:spcPts val="0"/>
+              </a:spcAft>
+              <a:buNone/>
+            </a:pPr>
+            <a:r>
+              <a:t/>
+            </a:r>
+            <a:endParaRPr/>
+          </a:p>
+          <a:p>
+            <a:pPr indent="0" lvl="0" marL="0" rtl="0" algn="l">
+              <a:spcBef>
+                <a:spcPts val="0"/>
+              </a:spcBef>
+              <a:spcAft>
+                <a:spcPts val="0"/>
+              </a:spcAft>
+              <a:buNone/>
+            </a:pPr>
+            <a:r>
+              <a:rPr lang="en-US"/>
+              <a:t/>
+            </a:r>
+            <a:endParaRPr/>
+          </a:p>
+          <a:p>
+            <a:pPr indent="0" lvl="0" marL="0" rtl="0" algn="l">
+              <a:spcBef>
+                <a:spcPts val="0"/>
+              </a:spcBef>
+              <a:spcAft>
+                <a:spcPts val="0"/>
+              </a:spcAft>
+              <a:buNone/>
+            </a:pPr>
+            <a:r>
+              <a:t/>
+            </a:r>
+            <a:endParaRPr/>
+          </a:p>
+          <a:p>
+            <a:pPr indent="0" lvl="0" marL="0" rtl="0" algn="l">
+              <a:spcBef>
+                <a:spcPts val="0"/>
+              </a:spcBef>
+              <a:spcAft>
+                <a:spcPts val="0"/>
+              </a:spcAft>
+              <a:buNone/>
+            </a:pPr>
+            <a:r>
+              <a:rPr lang="en-US"/>
+              <a:t/>
+            </a:r>
+            <a:endParaRPr/>
+          </a:p>
+          <a:p>
+            <a:pPr indent="0" lvl="0" marL="0" rtl="0" algn="l">
+              <a:spcBef>
+                <a:spcPts val="0"/>
+              </a:spcBef>
+              <a:spcAft>
+                <a:spcPts val="0"/>
+              </a:spcAft>
+              <a:buNone/>
+            </a:pPr>
+            <a:r>
+              <a:t/>
+            </a:r>
+            <a:endParaRPr/>
+          </a:p>
+          <a:p>
+            <a:pPr indent="0" lvl="0" marL="0" rtl="0" algn="l">
+              <a:spcBef>
+                <a:spcPts val="0"/>
+              </a:spcBef>
+              <a:spcAft>
+                <a:spcPts val="0"/>
+              </a:spcAft>
+              <a:buNone/>
+            </a:pPr>
+            <a:r>
+              <a:rPr lang="en-US"/>
+              <a:t/>
             </a:r>
             <a:endParaRPr/>
           </a:p>
@@ -8709,131 +8709,131 @@
             </a:pPr>
             <a:r>
               <a:rPr lang="en-US"/>
-              <a:t>S10 · 07/15 · bloque 25–40. Recuperación.</a:t>
-            </a:r>
-            <a:endParaRPr/>
-          </a:p>
-          <a:p>
-            <a:pPr indent="0" lvl="0" marL="0" rtl="0" algn="l">
-              <a:spcBef>
-                <a:spcPts val="0"/>
-              </a:spcBef>
-              <a:spcAft>
-                <a:spcPts val="0"/>
-              </a:spcAft>
-              <a:buNone/>
-            </a:pPr>
-            <a:r>
-              <a:t/>
-            </a:r>
-            <a:endParaRPr/>
-          </a:p>
-          <a:p>
-            <a:pPr indent="0" lvl="0" marL="0" rtl="0" algn="l">
-              <a:spcBef>
-                <a:spcPts val="0"/>
-              </a:spcBef>
-              <a:spcAft>
-                <a:spcPts val="0"/>
-              </a:spcAft>
-              <a:buNone/>
-            </a:pPr>
-            <a:r>
-              <a:rPr lang="en-US"/>
-              <a:t>Cambia a RAG básico. La conversación se vacía.</a:t>
-            </a:r>
-            <a:endParaRPr/>
-          </a:p>
-          <a:p>
-            <a:pPr indent="0" lvl="0" marL="0" rtl="0" algn="l">
-              <a:spcBef>
-                <a:spcPts val="0"/>
-              </a:spcBef>
-              <a:spcAft>
-                <a:spcPts val="0"/>
-              </a:spcAft>
-              <a:buNone/>
-            </a:pPr>
-            <a:r>
-              <a:t/>
-            </a:r>
-            <a:endParaRPr/>
-          </a:p>
-          <a:p>
-            <a:pPr indent="0" lvl="0" marL="0" rtl="0" algn="l">
-              <a:spcBef>
-                <a:spcPts val="0"/>
-              </a:spcBef>
-              <a:spcAft>
-                <a:spcPts val="0"/>
-              </a:spcAft>
-              <a:buNone/>
-            </a:pPr>
-            <a:r>
-              <a:rPr lang="en-US"/>
-              <a:t>Pregunta de calendario en General: debe pedir L/X o M/J y no mostrar las dos fechas.</a:t>
-            </a:r>
-            <a:endParaRPr/>
-          </a:p>
-          <a:p>
-            <a:pPr indent="0" lvl="0" marL="0" rtl="0" algn="l">
-              <a:spcBef>
-                <a:spcPts val="0"/>
-              </a:spcBef>
-              <a:spcAft>
-                <a:spcPts val="0"/>
-              </a:spcAft>
-              <a:buNone/>
-            </a:pPr>
-            <a:r>
-              <a:t/>
-            </a:r>
-            <a:endParaRPr/>
-          </a:p>
-          <a:p>
-            <a:pPr indent="0" lvl="0" marL="0" rtl="0" algn="l">
-              <a:spcBef>
-                <a:spcPts val="0"/>
-              </a:spcBef>
-              <a:spcAft>
-                <a:spcPts val="0"/>
-              </a:spcAft>
-              <a:buNone/>
-            </a:pPr>
-            <a:r>
-              <a:rPr lang="en-US"/>
-              <a:t>En M/J, la clase de RAG S10 debe mostrar 2026-10-22 y no 2026-10-26.</a:t>
-            </a:r>
-            <a:endParaRPr/>
-          </a:p>
-          <a:p>
-            <a:pPr indent="0" lvl="0" marL="0" rtl="0" algn="l">
-              <a:spcBef>
-                <a:spcPts val="0"/>
-              </a:spcBef>
-              <a:spcAft>
-                <a:spcPts val="0"/>
-              </a:spcAft>
-              <a:buNone/>
-            </a:pPr>
-            <a:r>
-              <a:t/>
-            </a:r>
-            <a:endParaRPr/>
-          </a:p>
-          <a:p>
-            <a:pPr indent="0" lvl="0" marL="0" rtl="0" algn="l">
-              <a:spcBef>
-                <a:spcPts val="0"/>
-              </a:spcBef>
-              <a:spcAft>
-                <a:spcPts val="0"/>
-              </a:spcAft>
-              <a:buNone/>
-            </a:pPr>
-            <a:r>
-              <a:rPr lang="en-US"/>
-              <a:t>La puntuación del panel es un coseno lexical. No la llames probabilidad ni relevancia de Vectorize.</a:t>
+              <a:t>S10 · 07/15 · bloque 25–40 min. Recorrido semántico de consulta (RAG_CONTEXT_MODE=semantic en apps/api/src/app.ts:670 y runLabBasicRag en lab/src/rag-basic.ts): 1) embeber la pregunta, 2) filtrar por metadatos/audiencia en el índice antes de leer, 3) ordenar candidatos por distancia/similitud, 4) aplicar el umbral calibrado y 5) construir el contexto.</a:t>
+            </a:r>
+            <a:endParaRPr/>
+          </a:p>
+          <a:p>
+            <a:pPr indent="0" lvl="0" marL="0" rtl="0" algn="l">
+              <a:spcBef>
+                <a:spcPts val="0"/>
+              </a:spcBef>
+              <a:spcAft>
+                <a:spcPts val="0"/>
+              </a:spcAft>
+              <a:buNone/>
+            </a:pPr>
+            <a:r>
+              <a:t/>
+            </a:r>
+            <a:endParaRPr/>
+          </a:p>
+          <a:p>
+            <a:pPr indent="0" lvl="0" marL="0" rtl="0" algn="l">
+              <a:spcBef>
+                <a:spcPts val="0"/>
+              </a:spcBef>
+              <a:spcAft>
+                <a:spcPts val="0"/>
+              </a:spcAft>
+              <a:buNone/>
+            </a:pPr>
+            <a:r>
+              <a:rPr lang="en-US"/>
+              <a:t/>
+            </a:r>
+            <a:endParaRPr/>
+          </a:p>
+          <a:p>
+            <a:pPr indent="0" lvl="0" marL="0" rtl="0" algn="l">
+              <a:spcBef>
+                <a:spcPts val="0"/>
+              </a:spcBef>
+              <a:spcAft>
+                <a:spcPts val="0"/>
+              </a:spcAft>
+              <a:buNone/>
+            </a:pPr>
+            <a:r>
+              <a:t/>
+            </a:r>
+            <a:endParaRPr/>
+          </a:p>
+          <a:p>
+            <a:pPr indent="0" lvl="0" marL="0" rtl="0" algn="l">
+              <a:spcBef>
+                <a:spcPts val="0"/>
+              </a:spcBef>
+              <a:spcAft>
+                <a:spcPts val="0"/>
+              </a:spcAft>
+              <a:buNone/>
+            </a:pPr>
+            <a:r>
+              <a:rPr lang="en-US"/>
+              <a:t/>
+            </a:r>
+            <a:endParaRPr/>
+          </a:p>
+          <a:p>
+            <a:pPr indent="0" lvl="0" marL="0" rtl="0" algn="l">
+              <a:spcBef>
+                <a:spcPts val="0"/>
+              </a:spcBef>
+              <a:spcAft>
+                <a:spcPts val="0"/>
+              </a:spcAft>
+              <a:buNone/>
+            </a:pPr>
+            <a:r>
+              <a:t/>
+            </a:r>
+            <a:endParaRPr/>
+          </a:p>
+          <a:p>
+            <a:pPr indent="0" lvl="0" marL="0" rtl="0" algn="l">
+              <a:spcBef>
+                <a:spcPts val="0"/>
+              </a:spcBef>
+              <a:spcAft>
+                <a:spcPts val="0"/>
+              </a:spcAft>
+              <a:buNone/>
+            </a:pPr>
+            <a:r>
+              <a:rPr lang="en-US"/>
+              <a:t/>
+            </a:r>
+            <a:endParaRPr/>
+          </a:p>
+          <a:p>
+            <a:pPr indent="0" lvl="0" marL="0" rtl="0" algn="l">
+              <a:spcBef>
+                <a:spcPts val="0"/>
+              </a:spcBef>
+              <a:spcAft>
+                <a:spcPts val="0"/>
+              </a:spcAft>
+              <a:buNone/>
+            </a:pPr>
+            <a:r>
+              <a:t/>
+            </a:r>
+            <a:endParaRPr/>
+          </a:p>
+          <a:p>
+            <a:pPr indent="0" lvl="0" marL="0" rtl="0" algn="l">
+              <a:spcBef>
+                <a:spcPts val="0"/>
+              </a:spcBef>
+              <a:spcAft>
+                <a:spcPts val="0"/>
+              </a:spcAft>
+              <a:buNone/>
+            </a:pPr>
+            <a:r>
+              <a:rPr lang="en-US"/>
+              <a:t/>
             </a:r>
             <a:endParaRPr/>
           </a:p>
@@ -9902,131 +9902,131 @@
             </a:pPr>
             <a:r>
               <a:rPr lang="en-US"/>
-              <a:t>S10 · 04/15 · bloque 10–25. Corpus.</a:t>
-            </a:r>
-            <a:endParaRPr/>
-          </a:p>
-          <a:p>
-            <a:pPr indent="0" lvl="0" marL="0" rtl="0" algn="l">
-              <a:spcBef>
-                <a:spcPts val="0"/>
-              </a:spcBef>
-              <a:spcAft>
-                <a:spcPts val="0"/>
-              </a:spcAft>
-              <a:buNone/>
-            </a:pPr>
-            <a:r>
-              <a:t/>
-            </a:r>
-            <a:endParaRPr/>
-          </a:p>
-          <a:p>
-            <a:pPr indent="0" lvl="0" marL="0" rtl="0" algn="l">
-              <a:spcBef>
-                <a:spcPts val="0"/>
-              </a:spcBef>
-              <a:spcAft>
-                <a:spcPts val="0"/>
-              </a:spcAft>
-              <a:buNone/>
-            </a:pPr>
-            <a:r>
-              <a:rPr lang="en-US"/>
-              <a:t>Abre corpus/COVERAGE.md y el banner de la app.</a:t>
-            </a:r>
-            <a:endParaRPr/>
-          </a:p>
-          <a:p>
-            <a:pPr indent="0" lvl="0" marL="0" rtl="0" algn="l">
-              <a:spcBef>
-                <a:spcPts val="0"/>
-              </a:spcBef>
-              <a:spcAft>
-                <a:spcPts val="0"/>
-              </a:spcAft>
-              <a:buNone/>
-            </a:pPr>
-            <a:r>
-              <a:t/>
-            </a:r>
-            <a:endParaRPr/>
-          </a:p>
-          <a:p>
-            <a:pPr indent="0" lvl="0" marL="0" rtl="0" algn="l">
-              <a:spcBef>
-                <a:spcPts val="0"/>
-              </a:spcBef>
-              <a:spcAft>
-                <a:spcPts val="0"/>
-              </a:spcAft>
-              <a:buNone/>
-            </a:pPr>
-            <a:r>
-              <a:rPr lang="en-US"/>
-              <a:t>Preparación c3a59a406888b. Contenido cc037ef0bb1f7. Perfil p9e8e8e03627e, fixture.</a:t>
-            </a:r>
-            <a:endParaRPr/>
-          </a:p>
-          <a:p>
-            <a:pPr indent="0" lvl="0" marL="0" rtl="0" algn="l">
-              <a:spcBef>
-                <a:spcPts val="0"/>
-              </a:spcBef>
-              <a:spcAft>
-                <a:spcPts val="0"/>
-              </a:spcAft>
-              <a:buNone/>
-            </a:pPr>
-            <a:r>
-              <a:t/>
-            </a:r>
-            <a:endParaRPr/>
-          </a:p>
-          <a:p>
-            <a:pPr indent="0" lvl="0" marL="0" rtl="0" algn="l">
-              <a:spcBef>
-                <a:spcPts val="0"/>
-              </a:spcBef>
-              <a:spcAft>
-                <a:spcPts val="0"/>
-              </a:spcAft>
-              <a:buNone/>
-            </a:pPr>
-            <a:r>
-              <a:rPr lang="en-US"/>
-              <a:t>Temario y calendarios completos. Ejercicios parciales: 12 resúmenes y 8 solo título.</a:t>
-            </a:r>
-            <a:endParaRPr/>
-          </a:p>
-          <a:p>
-            <a:pPr indent="0" lvl="0" marL="0" rtl="0" algn="l">
-              <a:spcBef>
-                <a:spcPts val="0"/>
-              </a:spcBef>
-              <a:spcAft>
-                <a:spcPts val="0"/>
-              </a:spcAft>
-              <a:buNone/>
-            </a:pPr>
-            <a:r>
-              <a:t/>
-            </a:r>
-            <a:endParaRPr/>
-          </a:p>
-          <a:p>
-            <a:pPr indent="0" lvl="0" marL="0" rtl="0" algn="l">
-              <a:spcBef>
-                <a:spcPts val="0"/>
-              </a:spcBef>
-              <a:spcAft>
-                <a:spcPts val="0"/>
-              </a:spcAft>
-              <a:buNone/>
-            </a:pPr>
-            <a:r>
-              <a:rPr lang="en-US"/>
-              <a:t>M/J S10 es el 22 de octubre. L/X S10 es el 26. No copies una fecha a la otra cohorte.</a:t>
+              <a:t>S10 · 11/15 · bloque 60–75 min. Reconstrucción desde índice vacío y protocolo de evaluación. En lab/, bun run lab:rebuild ejecuta TRUNCATE, lee los 10 documentos en bruto, genera los vectores de 768 d, los inserta y comprueba la lectura de vuelta. bun run lab:eval ejecuta las 20 preguntas de test (14 respondibles y 6 sin respuesta) sin reajustar el umbral.</a:t>
+            </a:r>
+            <a:endParaRPr/>
+          </a:p>
+          <a:p>
+            <a:pPr indent="0" lvl="0" marL="0" rtl="0" algn="l">
+              <a:spcBef>
+                <a:spcPts val="0"/>
+              </a:spcBef>
+              <a:spcAft>
+                <a:spcPts val="0"/>
+              </a:spcAft>
+              <a:buNone/>
+            </a:pPr>
+            <a:r>
+              <a:t/>
+            </a:r>
+            <a:endParaRPr/>
+          </a:p>
+          <a:p>
+            <a:pPr indent="0" lvl="0" marL="0" rtl="0" algn="l">
+              <a:spcBef>
+                <a:spcPts val="0"/>
+              </a:spcBef>
+              <a:spcAft>
+                <a:spcPts val="0"/>
+              </a:spcAft>
+              <a:buNone/>
+            </a:pPr>
+            <a:r>
+              <a:rPr lang="en-US"/>
+              <a:t/>
+            </a:r>
+            <a:endParaRPr/>
+          </a:p>
+          <a:p>
+            <a:pPr indent="0" lvl="0" marL="0" rtl="0" algn="l">
+              <a:spcBef>
+                <a:spcPts val="0"/>
+              </a:spcBef>
+              <a:spcAft>
+                <a:spcPts val="0"/>
+              </a:spcAft>
+              <a:buNone/>
+            </a:pPr>
+            <a:r>
+              <a:t/>
+            </a:r>
+            <a:endParaRPr/>
+          </a:p>
+          <a:p>
+            <a:pPr indent="0" lvl="0" marL="0" rtl="0" algn="l">
+              <a:spcBef>
+                <a:spcPts val="0"/>
+              </a:spcBef>
+              <a:spcAft>
+                <a:spcPts val="0"/>
+              </a:spcAft>
+              <a:buNone/>
+            </a:pPr>
+            <a:r>
+              <a:rPr lang="en-US"/>
+              <a:t/>
+            </a:r>
+            <a:endParaRPr/>
+          </a:p>
+          <a:p>
+            <a:pPr indent="0" lvl="0" marL="0" rtl="0" algn="l">
+              <a:spcBef>
+                <a:spcPts val="0"/>
+              </a:spcBef>
+              <a:spcAft>
+                <a:spcPts val="0"/>
+              </a:spcAft>
+              <a:buNone/>
+            </a:pPr>
+            <a:r>
+              <a:t/>
+            </a:r>
+            <a:endParaRPr/>
+          </a:p>
+          <a:p>
+            <a:pPr indent="0" lvl="0" marL="0" rtl="0" algn="l">
+              <a:spcBef>
+                <a:spcPts val="0"/>
+              </a:spcBef>
+              <a:spcAft>
+                <a:spcPts val="0"/>
+              </a:spcAft>
+              <a:buNone/>
+            </a:pPr>
+            <a:r>
+              <a:rPr lang="en-US"/>
+              <a:t/>
+            </a:r>
+            <a:endParaRPr/>
+          </a:p>
+          <a:p>
+            <a:pPr indent="0" lvl="0" marL="0" rtl="0" algn="l">
+              <a:spcBef>
+                <a:spcPts val="0"/>
+              </a:spcBef>
+              <a:spcAft>
+                <a:spcPts val="0"/>
+              </a:spcAft>
+              <a:buNone/>
+            </a:pPr>
+            <a:r>
+              <a:t/>
+            </a:r>
+            <a:endParaRPr/>
+          </a:p>
+          <a:p>
+            <a:pPr indent="0" lvl="0" marL="0" rtl="0" algn="l">
+              <a:spcBef>
+                <a:spcPts val="0"/>
+              </a:spcBef>
+              <a:spcAft>
+                <a:spcPts val="0"/>
+              </a:spcAft>
+              <a:buNone/>
+            </a:pPr>
+            <a:r>
+              <a:rPr lang="en-US"/>
+              <a:t/>
             </a:r>
             <a:endParaRPr/>
           </a:p>
@@ -11095,131 +11095,131 @@
             </a:pPr>
             <a:r>
               <a:rPr lang="en-US"/>
-              <a:t>S10 · 05/15 · bloque 10–25, preparación frente a consulta.</a:t>
-            </a:r>
-            <a:endParaRPr/>
-          </a:p>
-          <a:p>
-            <a:pPr indent="0" lvl="0" marL="0" rtl="0" algn="l">
-              <a:spcBef>
-                <a:spcPts val="0"/>
-              </a:spcBef>
-              <a:spcAft>
-                <a:spcPts val="0"/>
-              </a:spcAft>
-              <a:buNone/>
-            </a:pPr>
-            <a:r>
-              <a:t/>
-            </a:r>
-            <a:endParaRPr/>
-          </a:p>
-          <a:p>
-            <a:pPr indent="0" lvl="0" marL="0" rtl="0" algn="l">
-              <a:spcBef>
-                <a:spcPts val="0"/>
-              </a:spcBef>
-              <a:spcAft>
-                <a:spcPts val="0"/>
-              </a:spcAft>
-              <a:buNone/>
-            </a:pPr>
-            <a:r>
-              <a:rPr lang="en-US"/>
-              <a:t>El puente TypeScript: una plantilla `${v}:${doc}:${o}` equivale a un f-string de Python.</a:t>
-            </a:r>
-            <a:endParaRPr/>
-          </a:p>
-          <a:p>
-            <a:pPr indent="0" lvl="0" marL="0" rtl="0" algn="l">
-              <a:spcBef>
-                <a:spcPts val="0"/>
-              </a:spcBef>
-              <a:spcAft>
-                <a:spcPts val="0"/>
-              </a:spcAft>
-              <a:buNone/>
-            </a:pPr>
-            <a:r>
-              <a:t/>
-            </a:r>
-            <a:endParaRPr/>
-          </a:p>
-          <a:p>
-            <a:pPr indent="0" lvl="0" marL="0" rtl="0" algn="l">
-              <a:spcBef>
-                <a:spcPts val="0"/>
-              </a:spcBef>
-              <a:spcAft>
-                <a:spcPts val="0"/>
-              </a:spcAft>
-              <a:buNone/>
-            </a:pPr>
-            <a:r>
-              <a:rPr lang="en-US"/>
-              <a:t>chunkId está en packages/rag/src/chunk.ts. No reescribas el proyecto en Python.</a:t>
-            </a:r>
-            <a:endParaRPr/>
-          </a:p>
-          <a:p>
-            <a:pPr indent="0" lvl="0" marL="0" rtl="0" algn="l">
-              <a:spcBef>
-                <a:spcPts val="0"/>
-              </a:spcBef>
-              <a:spcAft>
-                <a:spcPts val="0"/>
-              </a:spcAft>
-              <a:buNone/>
-            </a:pPr>
-            <a:r>
-              <a:t/>
-            </a:r>
-            <a:endParaRPr/>
-          </a:p>
-          <a:p>
-            <a:pPr indent="0" lvl="0" marL="0" rtl="0" algn="l">
-              <a:spcBef>
-                <a:spcPts val="0"/>
-              </a:spcBef>
-              <a:spcAft>
-                <a:spcPts val="0"/>
-              </a:spcAft>
-              <a:buNone/>
-            </a:pPr>
-            <a:r>
-              <a:rPr lang="en-US"/>
-              <a:t>corpus.json no trae el cuerpo. La ingesta lo lee de corpus/sources y comprueba sourceHash.</a:t>
-            </a:r>
-            <a:endParaRPr/>
-          </a:p>
-          <a:p>
-            <a:pPr indent="0" lvl="0" marL="0" rtl="0" algn="l">
-              <a:spcBef>
-                <a:spcPts val="0"/>
-              </a:spcBef>
-              <a:spcAft>
-                <a:spcPts val="0"/>
-              </a:spcAft>
-              <a:buNone/>
-            </a:pPr>
-            <a:r>
-              <a:t/>
-            </a:r>
-            <a:endParaRPr/>
-          </a:p>
-          <a:p>
-            <a:pPr indent="0" lvl="0" marL="0" rtl="0" algn="l">
-              <a:spcBef>
-                <a:spcPts val="0"/>
-              </a:spcBef>
-              <a:spcAft>
-                <a:spcPts val="0"/>
-              </a:spcAft>
-              <a:buNone/>
-            </a:pPr>
-            <a:r>
-              <a:rPr lang="en-US"/>
-              <a:t>Hoy en clase no ejecutes la ingesta remota.</a:t>
+              <a:t>S10 · 04/15 · bloque 10–25 min. Corpus y perfiles verificados. En el demostrador del curso: preparación c3a59a406888b (22 documentos, 69 fragmentos) y perfil activo p76509a5f9743 (BGE-M3, 1024 dimensiones, coseno, umbral 0,50). En el laboratorio del ejercicio (lab/): 10 documentos ficticios de AetherCloud (lab-689164ca81cd, 20 fragmentos) sobre PostgreSQL + pgvector con vector(768) e índice HNSW.</a:t>
+            </a:r>
+            <a:endParaRPr/>
+          </a:p>
+          <a:p>
+            <a:pPr indent="0" lvl="0" marL="0" rtl="0" algn="l">
+              <a:spcBef>
+                <a:spcPts val="0"/>
+              </a:spcBef>
+              <a:spcAft>
+                <a:spcPts val="0"/>
+              </a:spcAft>
+              <a:buNone/>
+            </a:pPr>
+            <a:r>
+              <a:t/>
+            </a:r>
+            <a:endParaRPr/>
+          </a:p>
+          <a:p>
+            <a:pPr indent="0" lvl="0" marL="0" rtl="0" algn="l">
+              <a:spcBef>
+                <a:spcPts val="0"/>
+              </a:spcBef>
+              <a:spcAft>
+                <a:spcPts val="0"/>
+              </a:spcAft>
+              <a:buNone/>
+            </a:pPr>
+            <a:r>
+              <a:rPr lang="en-US"/>
+              <a:t/>
+            </a:r>
+            <a:endParaRPr/>
+          </a:p>
+          <a:p>
+            <a:pPr indent="0" lvl="0" marL="0" rtl="0" algn="l">
+              <a:spcBef>
+                <a:spcPts val="0"/>
+              </a:spcBef>
+              <a:spcAft>
+                <a:spcPts val="0"/>
+              </a:spcAft>
+              <a:buNone/>
+            </a:pPr>
+            <a:r>
+              <a:t/>
+            </a:r>
+            <a:endParaRPr/>
+          </a:p>
+          <a:p>
+            <a:pPr indent="0" lvl="0" marL="0" rtl="0" algn="l">
+              <a:spcBef>
+                <a:spcPts val="0"/>
+              </a:spcBef>
+              <a:spcAft>
+                <a:spcPts val="0"/>
+              </a:spcAft>
+              <a:buNone/>
+            </a:pPr>
+            <a:r>
+              <a:rPr lang="en-US"/>
+              <a:t/>
+            </a:r>
+            <a:endParaRPr/>
+          </a:p>
+          <a:p>
+            <a:pPr indent="0" lvl="0" marL="0" rtl="0" algn="l">
+              <a:spcBef>
+                <a:spcPts val="0"/>
+              </a:spcBef>
+              <a:spcAft>
+                <a:spcPts val="0"/>
+              </a:spcAft>
+              <a:buNone/>
+            </a:pPr>
+            <a:r>
+              <a:t/>
+            </a:r>
+            <a:endParaRPr/>
+          </a:p>
+          <a:p>
+            <a:pPr indent="0" lvl="0" marL="0" rtl="0" algn="l">
+              <a:spcBef>
+                <a:spcPts val="0"/>
+              </a:spcBef>
+              <a:spcAft>
+                <a:spcPts val="0"/>
+              </a:spcAft>
+              <a:buNone/>
+            </a:pPr>
+            <a:r>
+              <a:rPr lang="en-US"/>
+              <a:t/>
+            </a:r>
+            <a:endParaRPr/>
+          </a:p>
+          <a:p>
+            <a:pPr indent="0" lvl="0" marL="0" rtl="0" algn="l">
+              <a:spcBef>
+                <a:spcPts val="0"/>
+              </a:spcBef>
+              <a:spcAft>
+                <a:spcPts val="0"/>
+              </a:spcAft>
+              <a:buNone/>
+            </a:pPr>
+            <a:r>
+              <a:t/>
+            </a:r>
+            <a:endParaRPr/>
+          </a:p>
+          <a:p>
+            <a:pPr indent="0" lvl="0" marL="0" rtl="0" algn="l">
+              <a:spcBef>
+                <a:spcPts val="0"/>
+              </a:spcBef>
+              <a:spcAft>
+                <a:spcPts val="0"/>
+              </a:spcAft>
+              <a:buNone/>
+            </a:pPr>
+            <a:r>
+              <a:rPr lang="en-US"/>
+              <a:t/>
             </a:r>
             <a:endParaRPr/>
           </a:p>
@@ -12291,116 +12291,116 @@
             </a:pPr>
             <a:r>
               <a:rPr lang="en-US"/>
-              <a:t>S10 · 11/15 · actualización y protocolo.</a:t>
-            </a:r>
-            <a:endParaRPr/>
-          </a:p>
-          <a:p>
-            <a:pPr indent="0" lvl="0" marL="0" rtl="0" algn="l">
-              <a:spcBef>
-                <a:spcPts val="0"/>
-              </a:spcBef>
-              <a:spcAft>
-                <a:spcPts val="0"/>
-              </a:spcAft>
-              <a:buNone/>
-            </a:pPr>
-            <a:r>
-              <a:t/>
-            </a:r>
-            <a:endParaRPr/>
-          </a:p>
-          <a:p>
-            <a:pPr indent="0" lvl="0" marL="0" rtl="0" algn="l">
-              <a:spcBef>
-                <a:spcPts val="0"/>
-              </a:spcBef>
-              <a:spcAft>
-                <a:spcPts val="0"/>
-              </a:spcAft>
-              <a:buNone/>
-            </a:pPr>
-            <a:r>
-              <a:rPr lang="en-US"/>
-              <a:t>Abre corpus/fixtures/fragmento-sintetico.json. Léelo. No lo ingieras en el corpus del curso.</a:t>
-            </a:r>
-            <a:endParaRPr/>
-          </a:p>
-          <a:p>
-            <a:pPr indent="0" lvl="0" marL="0" rtl="0" algn="l">
-              <a:spcBef>
-                <a:spcPts val="0"/>
-              </a:spcBef>
-              <a:spcAft>
-                <a:spcPts val="0"/>
-              </a:spcAft>
-              <a:buNone/>
-            </a:pPr>
-            <a:r>
-              <a:t/>
-            </a:r>
-            <a:endParaRPr/>
-          </a:p>
-          <a:p>
-            <a:pPr indent="0" lvl="0" marL="0" rtl="0" algn="l">
-              <a:spcBef>
-                <a:spcPts val="0"/>
-              </a:spcBef>
-              <a:spcAft>
-                <a:spcPts val="0"/>
-              </a:spcAft>
-              <a:buNone/>
-            </a:pPr>
-            <a:r>
-              <a:rPr lang="en-US"/>
-              <a:t>Di: está marcado como sintético y no describe sesiones ni profesores.</a:t>
-            </a:r>
-            <a:endParaRPr/>
-          </a:p>
-          <a:p>
-            <a:pPr indent="0" lvl="0" marL="0" rtl="0" algn="l">
-              <a:spcBef>
-                <a:spcPts val="0"/>
-              </a:spcBef>
-              <a:spcAft>
-                <a:spcPts val="0"/>
-              </a:spcAft>
-              <a:buNone/>
-            </a:pPr>
-            <a:r>
-              <a:t/>
-            </a:r>
-            <a:endParaRPr/>
-          </a:p>
-          <a:p>
-            <a:pPr indent="0" lvl="0" marL="0" rtl="0" algn="l">
-              <a:spcBef>
-                <a:spcPts val="0"/>
-              </a:spcBef>
-              <a:spcAft>
-                <a:spcPts val="0"/>
-              </a:spcAft>
-              <a:buNone/>
-            </a:pPr>
-            <a:r>
-              <a:rPr lang="en-US"/>
-              <a:t>Reindexar de verdad exige recursos remotos que hoy no están autorizados.</a:t>
-            </a:r>
-            <a:endParaRPr/>
-          </a:p>
-          <a:p>
-            <a:pPr indent="0" lvl="0" marL="0" rtl="0" algn="l">
-              <a:spcBef>
-                <a:spcPts val="0"/>
-              </a:spcBef>
-              <a:spcAft>
-                <a:spcPts val="0"/>
-              </a:spcAft>
-              <a:buNone/>
-            </a:pPr>
-            <a:r>
-              <a:rPr lang="en-US"/>
-              <a:t>La comparación de 20 preguntas está preparada y no ejecutada.</a:t>
+              <a:t>S10 · 05/15 · bloque 10–25 min. Decisiones de fragmentación y solapamiento en packages/rag/src/chunk.ts y lab/src/corpus.ts. Se limpia el texto, se divide primero por secciones Markdown (##) y luego por párrafos hasta 900 caracteres con 80 de solapamiento. Explica por qué el solapamiento evita cortar una condición o cifra entre dos fragmentos y cómo se preserva la sección en el ID estable version:documento:ordinal.</a:t>
+            </a:r>
+            <a:endParaRPr/>
+          </a:p>
+          <a:p>
+            <a:pPr indent="0" lvl="0" marL="0" rtl="0" algn="l">
+              <a:spcBef>
+                <a:spcPts val="0"/>
+              </a:spcBef>
+              <a:spcAft>
+                <a:spcPts val="0"/>
+              </a:spcAft>
+              <a:buNone/>
+            </a:pPr>
+            <a:r>
+              <a:t/>
+            </a:r>
+            <a:endParaRPr/>
+          </a:p>
+          <a:p>
+            <a:pPr indent="0" lvl="0" marL="0" rtl="0" algn="l">
+              <a:spcBef>
+                <a:spcPts val="0"/>
+              </a:spcBef>
+              <a:spcAft>
+                <a:spcPts val="0"/>
+              </a:spcAft>
+              <a:buNone/>
+            </a:pPr>
+            <a:r>
+              <a:rPr lang="en-US"/>
+              <a:t/>
+            </a:r>
+            <a:endParaRPr/>
+          </a:p>
+          <a:p>
+            <a:pPr indent="0" lvl="0" marL="0" rtl="0" algn="l">
+              <a:spcBef>
+                <a:spcPts val="0"/>
+              </a:spcBef>
+              <a:spcAft>
+                <a:spcPts val="0"/>
+              </a:spcAft>
+              <a:buNone/>
+            </a:pPr>
+            <a:r>
+              <a:t/>
+            </a:r>
+            <a:endParaRPr/>
+          </a:p>
+          <a:p>
+            <a:pPr indent="0" lvl="0" marL="0" rtl="0" algn="l">
+              <a:spcBef>
+                <a:spcPts val="0"/>
+              </a:spcBef>
+              <a:spcAft>
+                <a:spcPts val="0"/>
+              </a:spcAft>
+              <a:buNone/>
+            </a:pPr>
+            <a:r>
+              <a:rPr lang="en-US"/>
+              <a:t/>
+            </a:r>
+            <a:endParaRPr/>
+          </a:p>
+          <a:p>
+            <a:pPr indent="0" lvl="0" marL="0" rtl="0" algn="l">
+              <a:spcBef>
+                <a:spcPts val="0"/>
+              </a:spcBef>
+              <a:spcAft>
+                <a:spcPts val="0"/>
+              </a:spcAft>
+              <a:buNone/>
+            </a:pPr>
+            <a:r>
+              <a:t/>
+            </a:r>
+            <a:endParaRPr/>
+          </a:p>
+          <a:p>
+            <a:pPr indent="0" lvl="0" marL="0" rtl="0" algn="l">
+              <a:spcBef>
+                <a:spcPts val="0"/>
+              </a:spcBef>
+              <a:spcAft>
+                <a:spcPts val="0"/>
+              </a:spcAft>
+              <a:buNone/>
+            </a:pPr>
+            <a:r>
+              <a:rPr lang="en-US"/>
+              <a:t/>
+            </a:r>
+            <a:endParaRPr/>
+          </a:p>
+          <a:p>
+            <a:pPr indent="0" lvl="0" marL="0" rtl="0" algn="l">
+              <a:spcBef>
+                <a:spcPts val="0"/>
+              </a:spcBef>
+              <a:spcAft>
+                <a:spcPts val="0"/>
+              </a:spcAft>
+              <a:buNone/>
+            </a:pPr>
+            <a:r>
+              <a:rPr lang="en-US"/>
+              <a:t/>
             </a:r>
             <a:endParaRPr/>
           </a:p>
@@ -22952,7 +22952,7 @@
                 <a:cs typeface="Inter"/>
                 <a:sym typeface="Inter"/>
               </a:rPr>
-              <a:t>Sin documentos y una sola búsqueda.</a:t>
+              <a:t>Recorrido semántico, umbral previo y citas verificables.</a:t>
             </a:r>
             <a:endParaRPr sz="1800">
               <a:solidFill>
@@ -22987,7 +22987,7 @@
                 <a:cs typeface="Inter"/>
                 <a:sym typeface="Inter"/>
               </a:rPr>
-              <a:t>La aplicación ya está construida.</a:t>
+              <a:t>Demostrador del curso y laboratorio pgvector reproducible.</a:t>
             </a:r>
             <a:endParaRPr sz="1800">
               <a:solidFill>
@@ -23287,7 +23287,7 @@
                 <a:cs typeface="Inter"/>
                 <a:sym typeface="Inter"/>
               </a:rPr>
-              <a:t>Demo local · TypeScript · Fixture</a:t>
+              <a:t>Semántico · BGE-M3 1024 / pgvector 768</a:t>
             </a:r>
             <a:endParaRPr sz="1600">
               <a:solidFill>
@@ -24918,7 +24918,7 @@
                 <a:cs typeface="Inter"/>
                 <a:sym typeface="Inter"/>
               </a:rPr>
-              <a:t>Mirar la recuperación antes</a:t>
+              <a:t>Calibración del umbral y rechazo</a:t>
             </a:r>
             <a:endParaRPr b="1" sz="2800">
               <a:solidFill>
@@ -24979,7 +24979,7 @@
                 <a:cs typeface="Inter"/>
                 <a:sym typeface="Inter"/>
               </a:rPr>
-              <a:t>La traza enseña consulta, puntuación y decisión.</a:t>
+              <a:t>Se calibra con validación separada del test; corta antes de generar.</a:t>
             </a:r>
             <a:endParaRPr>
               <a:solidFill>
@@ -25371,7 +25371,7 @@
                 <a:cs typeface="Fira Code"/>
                 <a:sym typeface="Fira Code"/>
               </a:rPr>
-              <a:t>bun run dev</a:t>
+              <a:t>sim &gt;= 0.50 // BGE-M3 1024d</a:t>
             </a:r>
             <a:endParaRPr sz="1350">
               <a:solidFill>
@@ -25406,7 +25406,7 @@
                 <a:cs typeface="Fira Code"/>
                 <a:sym typeface="Fira Code"/>
               </a:rPr>
-              <a:t>http://localhost:5173/</a:t>
+              <a:t>dist &lt;= 0.75 // pgvector 768d</a:t>
             </a:r>
             <a:endParaRPr sz="1350">
               <a:solidFill>
@@ -25467,7 +25467,7 @@
                 <a:cs typeface="Inter"/>
                 <a:sym typeface="Inter"/>
               </a:rPr>
-              <a:t>Consulta</a:t>
+              <a:t>Validación</a:t>
             </a:r>
             <a:endParaRPr b="1" sz="1800">
               <a:solidFill>
@@ -25528,7 +25528,7 @@
                 <a:cs typeface="Inter"/>
                 <a:sym typeface="Inter"/>
               </a:rPr>
-              <a:t>Puntuación</a:t>
+              <a:t>Umbral</a:t>
             </a:r>
             <a:endParaRPr b="1" sz="1800">
               <a:solidFill>
@@ -25589,7 +25589,7 @@
                 <a:cs typeface="Inter"/>
                 <a:sym typeface="Inter"/>
               </a:rPr>
-              <a:t>Decisión</a:t>
+              <a:t>Rechazo</a:t>
             </a:r>
             <a:endParaRPr b="1" sz="1800">
               <a:solidFill>
@@ -25650,7 +25650,7 @@
                 <a:cs typeface="Inter"/>
                 <a:sym typeface="Inter"/>
               </a:rPr>
-              <a:t>Generar solo si hay contexto utilizable.</a:t>
+              <a:t>Un prompt de «si no sabes, dilo» no sustituye este control.</a:t>
             </a:r>
             <a:endParaRPr sz="1500">
               <a:solidFill>
@@ -25932,7 +25932,7 @@
                 <a:cs typeface="Inter"/>
                 <a:sym typeface="Inter"/>
               </a:rPr>
-              <a:t>Ejercicio y el paso a CRAG</a:t>
+              <a:t>Ejercicio S10 y el paso a CRAG</a:t>
             </a:r>
             <a:endParaRPr b="1" sz="2800">
               <a:solidFill>
@@ -25993,7 +25993,7 @@
                 <a:cs typeface="Inter"/>
                 <a:sym typeface="Inter"/>
               </a:rPr>
-              <a:t>La práctica local no exige pagar un alojamiento.</a:t>
+              <a:t>8+ documentos ficticios y PostgreSQL con pgvector (vector(768) + HNSW).</a:t>
             </a:r>
             <a:endParaRPr>
               <a:solidFill>
@@ -26108,7 +26108,7 @@
                 <a:cs typeface="Inter"/>
                 <a:sym typeface="Inter"/>
               </a:rPr>
-              <a:t>Qué entregar</a:t>
+              <a:t>Stack e índice</a:t>
             </a:r>
             <a:endParaRPr b="1" sz="1800">
               <a:solidFill>
@@ -26169,7 +26169,7 @@
                 <a:cs typeface="Inter"/>
                 <a:sym typeface="Inter"/>
               </a:rPr>
-              <a:t>Corpus, una búsqueda, cita y rechazo.</a:t>
+              <a:t>GEN_MODEL_ID, EMBEDDING_MODEL_ID, vector(768) e índice HNSW.</a:t>
             </a:r>
             <a:endParaRPr sz="1550">
               <a:solidFill>
@@ -26257,7 +26257,7 @@
                 <a:cs typeface="Inter"/>
                 <a:sym typeface="Inter"/>
               </a:rPr>
-              <a:t>Qué no pedir</a:t>
+              <a:t>Reconstrucción</a:t>
             </a:r>
             <a:endParaRPr b="1" sz="1800">
               <a:solidFill>
@@ -26318,7 +26318,7 @@
                 <a:cs typeface="Inter"/>
                 <a:sym typeface="Inter"/>
               </a:rPr>
-              <a:t>Ni despliegue ni una cuenta de pago.</a:t>
+              <a:t>Desde archivos en bruto e índice vacío, con umbral y citas.</a:t>
             </a:r>
             <a:endParaRPr sz="1550">
               <a:solidFill>
@@ -26406,7 +26406,7 @@
                 <a:cs typeface="Inter"/>
                 <a:sym typeface="Inter"/>
               </a:rPr>
-              <a:t>Después</a:t>
+              <a:t>Evaluación 14+6</a:t>
             </a:r>
             <a:endParaRPr b="1" sz="1800">
               <a:solidFill>
@@ -26467,7 +26467,7 @@
                 <a:cs typeface="Inter"/>
                 <a:sym typeface="Inter"/>
               </a:rPr>
-              <a:t>El 27 de octubre el mismo asistente pasa a CRAG.</a:t>
+              <a:t>Ejecutar las 20 preguntas y presentar aciertos/14 y rechazos/6.</a:t>
             </a:r>
             <a:endParaRPr sz="1550">
               <a:solidFill>
@@ -26637,7 +26637,7 @@
                 <a:cs typeface="Inter"/>
                 <a:sym typeface="Inter"/>
               </a:rPr>
-              <a:t>Orientativo del encargo original: 4 a 6 horas.</a:t>
+              <a:t>Dedicación orientativa: 4 a 6 horas. Laboratorio en lab/.</a:t>
             </a:r>
             <a:endParaRPr sz="1350">
               <a:solidFill>
@@ -26838,7 +26838,7 @@
                 <a:cs typeface="Inter"/>
                 <a:sym typeface="Inter"/>
               </a:rPr>
-              <a:t>Consulta · Demo y perfil real</a:t>
+              <a:t>Consulta · Los tres perfiles del proyecto</a:t>
             </a:r>
             <a:endParaRPr b="1" sz="2800">
               <a:solidFill>
@@ -26899,7 +26899,7 @@
                 <a:cs typeface="Inter"/>
                 <a:sym typeface="Inter"/>
               </a:rPr>
-              <a:t>La demo de hoy está verificada en local. Lo remoto sigue pendiente.</a:t>
+              <a:t>Recorrido semántico principal, laboratorio pgvector y respaldo demo.</a:t>
             </a:r>
             <a:endParaRPr>
               <a:solidFill>
@@ -27058,7 +27058,7 @@
                           <a:cs typeface="Inter"/>
                           <a:sym typeface="Inter"/>
                         </a:rPr>
-                        <a:t>Demo de clase</a:t>
+                        <a:t>Curso (semántico)</a:t>
                       </a:r>
                       <a:endParaRPr b="1" sz="1500">
                         <a:solidFill>
@@ -27101,7 +27101,7 @@
                           <a:cs typeface="Inter"/>
                           <a:sym typeface="Inter"/>
                         </a:rPr>
-                        <a:t>Perfil real</a:t>
+                        <a:t>Laboratorio (S10/S11)</a:t>
                       </a:r>
                       <a:endParaRPr b="1" sz="1500">
                         <a:solidFill>
@@ -27189,7 +27189,7 @@
                           <a:cs typeface="Inter"/>
                           <a:sym typeface="Inter"/>
                         </a:rPr>
-                        <a:t>Hash lexical, 128 d</a:t>
+                        <a:t>Vectorize 1024 d (BGE-M3)</a:t>
                       </a:r>
                       <a:endParaRPr sz="1500">
                         <a:solidFill>
@@ -27232,7 +27232,7 @@
                           <a:cs typeface="Inter"/>
                           <a:sym typeface="Inter"/>
                         </a:rPr>
-                        <a:t>Vectorize, dimensión pendiente</a:t>
+                        <a:t>pgvector vector(768) + HNSW</a:t>
                       </a:r>
                       <a:endParaRPr sz="1500">
                         <a:solidFill>
@@ -27277,7 +27277,7 @@
                           <a:cs typeface="Inter"/>
                           <a:sym typeface="Inter"/>
                         </a:rPr>
-                        <a:t>Generación</a:t>
+                        <a:t>Modelo</a:t>
                       </a:r>
                       <a:endParaRPr sz="1500">
                         <a:solidFill>
@@ -27320,7 +27320,7 @@
                           <a:cs typeface="Inter"/>
                           <a:sym typeface="Inter"/>
                         </a:rPr>
-                        <a:t>Stream sin modelo</a:t>
+                        <a:t>claude-haiku-5-5 (Anthropic)</a:t>
                       </a:r>
                       <a:endParaRPr sz="1500">
                         <a:solidFill>
@@ -27363,7 +27363,7 @@
                           <a:cs typeface="Inter"/>
                           <a:sym typeface="Inter"/>
                         </a:rPr>
-                        <a:t>OpenRouter, modelo pendiente</a:t>
+                        <a:t>GEN_MODEL_ID / EMBEDDING_MODEL_ID</a:t>
                       </a:r>
                       <a:endParaRPr sz="1500">
                         <a:solidFill>
@@ -27451,7 +27451,7 @@
                           <a:cs typeface="Inter"/>
                           <a:sym typeface="Inter"/>
                         </a:rPr>
-                        <a:t>0,33 solo de esta demo</a:t>
+                        <a:t>0,50 (variante: complete)</a:t>
                       </a:r>
                       <a:endParaRPr sz="1500">
                         <a:solidFill>
@@ -27494,7 +27494,7 @@
                           <a:cs typeface="Inter"/>
                           <a:sym typeface="Inter"/>
                         </a:rPr>
-                        <a:t>Calibrado; no copiar 0,33</a:t>
+                        <a:t>0,25 similitud (0,75 distancia &lt;=&gt;)</a:t>
                       </a:r>
                       <a:endParaRPr sz="1500">
                         <a:solidFill>
@@ -27565,7 +27565,7 @@
                 <a:cs typeface="Inter"/>
                 <a:sym typeface="Inter"/>
               </a:rPr>
-              <a:t>Un tope de gasto no demuestra solo el camino real.</a:t>
+              <a:t>En demo offline se usa fixture-token-hash-v1 (128 d, corte 0,33).</a:t>
             </a:r>
             <a:endParaRPr sz="1350">
               <a:solidFill>
@@ -30285,7 +30285,7 @@
                 <a:cs typeface="Inter"/>
                 <a:sym typeface="Inter"/>
               </a:rPr>
-              <a:t>Sin RAG, el corpus, una búsqueda y las citas.</a:t>
+              <a:t>Fragmentación, embeddings, índice HNSW, umbral y citas.</a:t>
             </a:r>
             <a:endParaRPr sz="1700">
               <a:solidFill>
@@ -31098,7 +31098,7 @@
                 <a:cs typeface="Inter"/>
                 <a:sym typeface="Inter"/>
               </a:rPr>
-              <a:t>En demo es un stream local, no un modelo.</a:t>
+              <a:t>El modelo responde sin fuentes y desconoce fechas internas.</a:t>
             </a:r>
             <a:endParaRPr sz="1550">
               <a:solidFill>
@@ -31247,7 +31247,7 @@
                 <a:cs typeface="Inter"/>
                 <a:sym typeface="Inter"/>
               </a:rPr>
-              <a:t>Uso y coste figuran como no medidos.</a:t>
+              <a:t>Sin citas; uso o coste desconocidos viajan como null.</a:t>
             </a:r>
             <a:endParaRPr sz="1550">
               <a:solidFill>
@@ -31584,7 +31584,7 @@
                 <a:cs typeface="Inter"/>
                 <a:sym typeface="Inter"/>
               </a:rPr>
-              <a:t>Fragmento, id y vector</a:t>
+              <a:t>Embeddings e índice vectorial</a:t>
             </a:r>
             <a:endParaRPr b="1" sz="2800">
               <a:solidFill>
@@ -31645,7 +31645,7 @@
                 <a:cs typeface="Inter"/>
                 <a:sym typeface="Inter"/>
               </a:rPr>
-              <a:t>El id es la cita. El vector de demo no es BGE-M3.</a:t>
+              <a:t>Mismo modelo y dimensión al ingerir documentos y al consultar.</a:t>
             </a:r>
             <a:endParaRPr>
               <a:solidFill>
@@ -32037,7 +32037,7 @@
                 <a:cs typeface="Fira Code"/>
                 <a:sym typeface="Fira Code"/>
               </a:rPr>
-              <a:t>function chunkId(v, doc, n) {</a:t>
+              <a:t>embedding vector(768) NOT NULL</a:t>
             </a:r>
             <a:endParaRPr sz="1350">
               <a:solidFill>
@@ -32072,7 +32072,7 @@
                 <a:cs typeface="Fira Code"/>
                 <a:sym typeface="Fira Code"/>
               </a:rPr>
-              <a:t xml:space="preserve">  const o = String(n).padStart(2, "0")</a:t>
+              <a:t xml:space="preserve">USING hnsw (embedding</a:t>
             </a:r>
             <a:endParaRPr sz="1350">
               <a:solidFill>
@@ -32098,7 +32098,16 @@
               <a:buNone/>
             </a:pPr>
             <a:r>
-              <a:t/>
+              <a:rPr lang="en-US" sz="1350">
+                <a:solidFill>
+                  <a:srgbClr val="32C5F4"/>
+                </a:solidFill>
+                <a:latin typeface="Fira Code"/>
+                <a:ea typeface="Fira Code"/>
+                <a:cs typeface="Fira Code"/>
+                <a:sym typeface="Fira Code"/>
+              </a:rPr>
+              <a:t>  vector_cosine_ops)</a:t>
             </a:r>
             <a:endParaRPr sz="1350">
               <a:solidFill>
@@ -32133,7 +32142,7 @@
                 <a:cs typeface="Fira Code"/>
                 <a:sym typeface="Fira Code"/>
               </a:rPr>
-              <a:t xml:space="preserve">  return `${v}:${doc}:${o}`</a:t>
+              <a:t xml:space="preserve">WITH (m = 16, ef_construction = 64)</a:t>
             </a:r>
             <a:endParaRPr sz="1350">
               <a:solidFill>
@@ -32168,7 +32177,7 @@
                 <a:cs typeface="Fira Code"/>
                 <a:sym typeface="Fira Code"/>
               </a:rPr>
-              <a:t>}</a:t>
+              <a:t/>
             </a:r>
             <a:endParaRPr sz="1350">
               <a:solidFill>
@@ -32203,7 +32212,7 @@
                 <a:cs typeface="Fira Code"/>
                 <a:sym typeface="Fira Code"/>
               </a:rPr>
-              <a:t>vectorIdFor(id) // cabe en 64 bytes</a:t>
+              <a:t/>
             </a:r>
             <a:endParaRPr sz="1350">
               <a:solidFill>
@@ -32264,7 +32273,7 @@
                 <a:cs typeface="Inter"/>
                 <a:sym typeface="Inter"/>
               </a:rPr>
-              <a:t>Texto</a:t>
+              <a:t>Fragmento</a:t>
             </a:r>
             <a:endParaRPr b="1" sz="1800">
               <a:solidFill>
@@ -32325,7 +32334,7 @@
                 <a:cs typeface="Inter"/>
                 <a:sym typeface="Inter"/>
               </a:rPr>
-              <a:t>Identificador</a:t>
+              <a:t>Vector 768/1024</a:t>
             </a:r>
             <a:endParaRPr b="1" sz="1800">
               <a:solidFill>
@@ -32386,7 +32395,7 @@
                 <a:cs typeface="Inter"/>
                 <a:sym typeface="Inter"/>
               </a:rPr>
-              <a:t>Vector</a:t>
+              <a:t>Índice HNSW</a:t>
             </a:r>
             <a:endParaRPr b="1" sz="1800">
               <a:solidFill>
@@ -32447,7 +32456,7 @@
                 <a:cs typeface="Inter"/>
                 <a:sym typeface="Inter"/>
               </a:rPr>
-              <a:t>fixture-token-hash-v1 · 128 · coseno</a:t>
+              <a:t>Lab: vector(768) + HNSW · Curso: BGE-M3 1024 d</a:t>
             </a:r>
             <a:endParaRPr sz="1500">
               <a:solidFill>
@@ -32508,7 +32517,7 @@
                 <a:cs typeface="Fira Code"/>
                 <a:sym typeface="Fira Code"/>
               </a:rPr>
-              <a:t>Umbral lexical de la demo: 0,33</a:t>
+              <a:t>En pgvector &lt;=&gt;, menor distancia = más próximo</a:t>
             </a:r>
             <a:endParaRPr sz="1300">
               <a:solidFill>
@@ -32790,7 +32799,7 @@
                 <a:cs typeface="Inter"/>
                 <a:sym typeface="Inter"/>
               </a:rPr>
-              <a:t>Contexto, respuesta y cita</a:t>
+              <a:t>Construcción del contexto y citas</a:t>
             </a:r>
             <a:endParaRPr b="1" sz="2800">
               <a:solidFill>
@@ -32851,7 +32860,7 @@
                 <a:cs typeface="Inter"/>
                 <a:sym typeface="Inter"/>
               </a:rPr>
-              <a:t>La cita usa el id del fragmento. Se puede abrir.</a:t>
+              <a:t>El texto recuperado es dato no fiable, nunca instrucción.</a:t>
             </a:r>
             <a:endParaRPr>
               <a:solidFill>
@@ -32966,7 +32975,7 @@
                 <a:cs typeface="Inter"/>
                 <a:sym typeface="Inter"/>
               </a:rPr>
-              <a:t>Contexto</a:t>
+              <a:t>Bloque DATOS</a:t>
             </a:r>
             <a:endParaRPr b="1" sz="1800">
               <a:solidFill>
@@ -33027,7 +33036,7 @@
                 <a:cs typeface="Inter"/>
                 <a:sym typeface="Inter"/>
               </a:rPr>
-              <a:t>Solo entran los fragmentos seleccionados.</a:t>
+              <a:t>Aísla los fragmentos frente a instrucciones incrustadas.</a:t>
             </a:r>
             <a:endParaRPr sz="1550">
               <a:solidFill>
@@ -33115,7 +33124,7 @@
                 <a:cs typeface="Inter"/>
                 <a:sym typeface="Inter"/>
               </a:rPr>
-              <a:t>Respuesta</a:t>
+              <a:t>Generación</a:t>
             </a:r>
             <a:endParaRPr b="1" sz="1800">
               <a:solidFill>
@@ -33176,7 +33185,7 @@
                 <a:cs typeface="Inter"/>
                 <a:sym typeface="Inter"/>
               </a:rPr>
-              <a:t>En demo no llama a un modelo de pago.</a:t>
+              <a:t>Redacta solo con los fragmentos que superaron el corte.</a:t>
             </a:r>
             <a:endParaRPr sz="1550">
               <a:solidFill>
@@ -33264,7 +33273,7 @@
                 <a:cs typeface="Inter"/>
                 <a:sym typeface="Inter"/>
               </a:rPr>
-              <a:t>Cita</a:t>
+              <a:t>Cita [cite:id]</a:t>
             </a:r>
             <a:endParaRPr b="1" sz="1800">
               <a:solidFill>
@@ -33325,7 +33334,7 @@
                 <a:cs typeface="Inter"/>
                 <a:sym typeface="Inter"/>
               </a:rPr>
-              <a:t>Formato [cite:id], resoluble en el corpus.</a:t>
+              <a:t>Se valida contra los IDs seleccionados antes de responder.</a:t>
             </a:r>
             <a:endParaRPr sz="1550">
               <a:solidFill>
@@ -33495,7 +33504,7 @@
                 <a:cs typeface="Fira Code"/>
                 <a:sym typeface="Fira Code"/>
               </a:rPr>
-              <a:t>Etapa RAG básico. Una sola búsqueda.</a:t>
+              <a:t>Variante complete: solo cuando todo el corpus cabe en ventana.</a:t>
             </a:r>
             <a:endParaRPr>
               <a:solidFill>
@@ -33696,7 +33705,7 @@
                 <a:cs typeface="Inter"/>
                 <a:sym typeface="Inter"/>
               </a:rPr>
-              <a:t>Recuperar, filtrar y puntuar</a:t>
+              <a:t>Consultar, filtrar y puntuar</a:t>
             </a:r>
             <a:endParaRPr b="1" sz="2800">
               <a:solidFill>
@@ -33757,7 +33766,7 @@
                 <a:cs typeface="Inter"/>
                 <a:sym typeface="Inter"/>
               </a:rPr>
-              <a:t>La puntuación ordena candidatos. No es una probabilidad.</a:t>
+              <a:t>Filtro en la consulta vectorial y selección por umbral previo.</a:t>
             </a:r>
             <a:endParaRPr>
               <a:solidFill>
@@ -33990,7 +33999,7 @@
                 <a:cs typeface="Inter"/>
                 <a:sym typeface="Inter"/>
               </a:rPr>
-              <a:t>Pregunta</a:t>
+              <a:t>Embebe</a:t>
             </a:r>
             <a:endParaRPr b="1" sz="1700">
               <a:solidFill>
@@ -34194,7 +34203,7 @@
                 <a:cs typeface="Inter"/>
                 <a:sym typeface="Inter"/>
               </a:rPr>
-              <a:t>Audiencia</a:t>
+              <a:t>Filtra</a:t>
             </a:r>
             <a:endParaRPr b="1" sz="1700">
               <a:solidFill>
@@ -34398,7 +34407,7 @@
                 <a:cs typeface="Inter"/>
                 <a:sym typeface="Inter"/>
               </a:rPr>
-              <a:t>Coseno</a:t>
+              <a:t>Distancia</a:t>
             </a:r>
             <a:endParaRPr b="1" sz="1700">
               <a:solidFill>
@@ -34806,7 +34815,7 @@
                 <a:cs typeface="Inter"/>
                 <a:sym typeface="Inter"/>
               </a:rPr>
-              <a:t>Candidatos</a:t>
+              <a:t>Contexto</a:t>
             </a:r>
             <a:endParaRPr b="1" sz="1700">
               <a:solidFill>
@@ -34867,7 +34876,7 @@
                 <a:cs typeface="Inter"/>
                 <a:sym typeface="Inter"/>
               </a:rPr>
-              <a:t>General no mezcla el calendario L/X con el M/J.</a:t>
+              <a:t>El filtro de grupo se aplica en la consulta, no solo en el prompt.</a:t>
             </a:r>
             <a:endParaRPr sz="1800">
               <a:solidFill>
@@ -35068,7 +35077,7 @@
                 <a:cs typeface="Inter"/>
                 <a:sym typeface="Inter"/>
               </a:rPr>
-              <a:t>Corpus de todo el programa</a:t>
+              <a:t>Corpus y perfiles del sistema</a:t>
             </a:r>
             <a:endParaRPr b="1" sz="2800">
               <a:solidFill>
@@ -35129,7 +35138,7 @@
                 <a:cs typeface="Inter"/>
                 <a:sym typeface="Inter"/>
               </a:rPr>
-              <a:t>S1 a S20 y dos calendarios. No es una empresa de ficción.</a:t>
+              <a:t>S1–S20 en el demostrador y 10 documentos ficticios en lab/.</a:t>
             </a:r>
             <a:endParaRPr>
               <a:solidFill>
@@ -35331,7 +35340,7 @@
                           <a:cs typeface="Inter"/>
                           <a:sym typeface="Inter"/>
                         </a:rPr>
-                        <a:t>Estado</a:t>
+                        <a:t>Estado verificado</a:t>
                       </a:r>
                       <a:endParaRPr b="1" sz="1500">
                         <a:solidFill>
@@ -35376,7 +35385,7 @@
                           <a:cs typeface="Inter"/>
                           <a:sym typeface="Inter"/>
                         </a:rPr>
-                        <a:t>Preparación</a:t>
+                        <a:t>Corpus curso</a:t>
                       </a:r>
                       <a:endParaRPr sz="1500">
                         <a:solidFill>
@@ -35462,7 +35471,7 @@
                           <a:cs typeface="Inter"/>
                           <a:sym typeface="Inter"/>
                         </a:rPr>
-                        <a:t>Congelada</a:t>
+                        <a:t>22 docs, 69 fragmentos</a:t>
                       </a:r>
                       <a:endParaRPr sz="1500">
                         <a:solidFill>
@@ -35507,7 +35516,7 @@
                           <a:cs typeface="Inter"/>
                           <a:sym typeface="Inter"/>
                         </a:rPr>
-                        <a:t>Contenido</a:t>
+                        <a:t>Índice real</a:t>
                       </a:r>
                       <a:endParaRPr sz="1500">
                         <a:solidFill>
@@ -35550,7 +35559,7 @@
                           <a:cs typeface="Inter"/>
                           <a:sym typeface="Inter"/>
                         </a:rPr>
-                        <a:t>cc037ef0bb1f7</a:t>
+                        <a:t>p76509a5f9743</a:t>
                       </a:r>
                       <a:endParaRPr sz="1500">
                         <a:solidFill>
@@ -35593,7 +35602,7 @@
                           <a:cs typeface="Inter"/>
                           <a:sym typeface="Inter"/>
                         </a:rPr>
-                        <a:t>Congelado</a:t>
+                        <a:t>BGE-M3 1024 d, coseno 0,50</a:t>
                       </a:r>
                       <a:endParaRPr sz="1500">
                         <a:solidFill>
@@ -35638,7 +35647,7 @@
                           <a:cs typeface="Inter"/>
                           <a:sym typeface="Inter"/>
                         </a:rPr>
-                        <a:t>Perfil demo</a:t>
+                        <a:t>Lab pgvector</a:t>
                       </a:r>
                       <a:endParaRPr sz="1500">
                         <a:solidFill>
@@ -35681,7 +35690,7 @@
                           <a:cs typeface="Inter"/>
                           <a:sym typeface="Inter"/>
                         </a:rPr>
-                        <a:t>p9e8e8e03627e</a:t>
+                        <a:t>lab-689164ca81cd</a:t>
                       </a:r>
                       <a:endParaRPr sz="1500">
                         <a:solidFill>
@@ -35724,7 +35733,7 @@
                           <a:cs typeface="Inter"/>
                           <a:sym typeface="Inter"/>
                         </a:rPr>
-                        <a:t>Fixture, no remoto</a:t>
+                        <a:t>10 docs, vector(768) + HNSW</a:t>
                       </a:r>
                       <a:endParaRPr sz="1500">
                         <a:solidFill>
@@ -35795,7 +35804,7 @@
                 <a:cs typeface="Inter"/>
                 <a:sym typeface="Inter"/>
               </a:rPr>
-              <a:t>Ocho ejercicios siguen solo con el título.</a:t>
+              <a:t>Ambos reconstruibles desde Markdown en bruto e índice vacío.</a:t>
             </a:r>
             <a:endParaRPr sz="1350">
               <a:solidFill>
@@ -35996,7 +36005,7 @@
                 <a:cs typeface="Inter"/>
                 <a:sym typeface="Inter"/>
               </a:rPr>
-              <a:t>Preparar no es preguntar</a:t>
+              <a:t>Fragmentación y solapamiento</a:t>
             </a:r>
             <a:endParaRPr b="1" sz="2800">
               <a:solidFill>
@@ -36057,7 +36066,7 @@
                 <a:cs typeface="Inter"/>
                 <a:sym typeface="Inter"/>
               </a:rPr>
-              <a:t>La preparación deja el corpus listo. La pregunta solo consulta.</a:t>
+              <a:t>Trocear por secciones y párrafos sin cortar un dato a mitad.</a:t>
             </a:r>
             <a:endParaRPr>
               <a:solidFill>
@@ -36285,7 +36294,7 @@
                 <a:cs typeface="Inter"/>
                 <a:sym typeface="Inter"/>
               </a:rPr>
-              <a:t>Preparación</a:t>
+              <a:t>Tamaño y solape</a:t>
             </a:r>
             <a:endParaRPr b="1" sz="2100">
               <a:solidFill>
@@ -36346,7 +36355,7 @@
                 <a:cs typeface="Inter"/>
                 <a:sym typeface="Inter"/>
               </a:rPr>
-              <a:t>Fragmentos, hash e identidad. No se repite en cada pregunta.</a:t>
+              <a:t>900 caracteres y 80 de solapamiento entre fragmentos.</a:t>
             </a:r>
             <a:endParaRPr sz="1600">
               <a:solidFill>
@@ -36407,7 +36416,7 @@
                 <a:cs typeface="Inter"/>
                 <a:sym typeface="Inter"/>
               </a:rPr>
-              <a:t>Consulta</a:t>
+              <a:t>Sección e ID</a:t>
             </a:r>
             <a:endParaRPr b="1" sz="2100">
               <a:solidFill>
@@ -36468,7 +36477,7 @@
                 <a:cs typeface="Inter"/>
                 <a:sym typeface="Inter"/>
               </a:rPr>
-              <a:t>Una búsqueda, filtro de audiencia y un umbral.</a:t>
+              <a:t>Conserva el encabezado H2 y crea un ID determinista.</a:t>
             </a:r>
             <a:endParaRPr sz="1600">
               <a:solidFill>
@@ -36585,7 +36594,7 @@
                 <a:cs typeface="Fira Code"/>
                 <a:sym typeface="Fira Code"/>
               </a:rPr>
-              <a:t>function chunkId(v, doc, n) {</a:t>
+              <a:t>chunkMarkdown(body, {</a:t>
             </a:r>
             <a:endParaRPr sz="1350">
               <a:solidFill>
@@ -36620,7 +36629,7 @@
                 <a:cs typeface="Fira Code"/>
                 <a:sym typeface="Fira Code"/>
               </a:rPr>
-              <a:t xml:space="preserve">  const o = String(n)</a:t>
+              <a:t xml:space="preserve">  maxChars: 900,</a:t>
             </a:r>
             <a:endParaRPr sz="1350">
               <a:solidFill>
@@ -36655,7 +36664,7 @@
                 <a:cs typeface="Fira Code"/>
                 <a:sym typeface="Fira Code"/>
               </a:rPr>
-              <a:t xml:space="preserve">    .padStart(2, "0")</a:t>
+              <a:t xml:space="preserve">  overlapChars: 80,</a:t>
             </a:r>
             <a:endParaRPr sz="1350">
               <a:solidFill>
@@ -36690,7 +36699,7 @@
                 <a:cs typeface="Fira Code"/>
                 <a:sym typeface="Fira Code"/>
               </a:rPr>
-              <a:t xml:space="preserve">  return `${v}:${doc}:${o}`</a:t>
+              <a:t xml:space="preserve">});</a:t>
             </a:r>
             <a:endParaRPr sz="1350">
               <a:solidFill>
@@ -36725,7 +36734,7 @@
                 <a:cs typeface="Fira Code"/>
                 <a:sym typeface="Fira Code"/>
               </a:rPr>
-              <a:t>}</a:t>
+              <a:t>// Conserva sección ##</a:t>
             </a:r>
             <a:endParaRPr sz="1350">
               <a:solidFill>
@@ -36760,7 +36769,7 @@
                 <a:cs typeface="Fira Code"/>
                 <a:sym typeface="Fira Code"/>
               </a:rPr>
-              <a:t>// c3a59a406888b:</a:t>
+              <a:t>// y solapa 80 chars</a:t>
             </a:r>
             <a:endParaRPr sz="1350">
               <a:solidFill>
@@ -36795,42 +36804,7 @@
                 <a:cs typeface="Fira Code"/>
                 <a:sym typeface="Fira Code"/>
               </a:rPr>
-              <a:t>// s05-langgraph:00</a:t>
-            </a:r>
-            <a:endParaRPr sz="1350">
-              <a:solidFill>
-                <a:srgbClr val="32C5F4"/>
-              </a:solidFill>
-              <a:latin typeface="Fira Code"/>
-              <a:ea typeface="Fira Code"/>
-              <a:cs typeface="Fira Code"/>
-              <a:sym typeface="Fira Code"/>
-            </a:endParaRPr>
-          </a:p>
-          <a:p>
-            <a:pPr indent="0" lvl="0" marL="0" rtl="0" algn="l">
-              <a:lnSpc>
-                <a:spcPct val="115000"/>
-              </a:lnSpc>
-              <a:spcBef>
-                <a:spcPts val="0"/>
-              </a:spcBef>
-              <a:spcAft>
-                <a:spcPts val="0"/>
-              </a:spcAft>
-              <a:buNone/>
-            </a:pPr>
-            <a:r>
-              <a:rPr lang="en-US" sz="1350">
-                <a:solidFill>
-                  <a:srgbClr val="32C5F4"/>
-                </a:solidFill>
-                <a:latin typeface="Fira Code"/>
-                <a:ea typeface="Fira Code"/>
-                <a:cs typeface="Fira Code"/>
-                <a:sym typeface="Fira Code"/>
-              </a:rPr>
-              <a:t>// Python: un f-string</a:t>
+              <a:t>// ID: version:doc:00</a:t>
             </a:r>
             <a:endParaRPr sz="1350">
               <a:solidFill>
@@ -36866,6 +36840,41 @@
                 <a:sym typeface="Fira Code"/>
               </a:rPr>
               <a:t>// packages/rag/src/chunk.ts</a:t>
+            </a:r>
+            <a:endParaRPr sz="1350">
+              <a:solidFill>
+                <a:srgbClr val="32C5F4"/>
+              </a:solidFill>
+              <a:latin typeface="Fira Code"/>
+              <a:ea typeface="Fira Code"/>
+              <a:cs typeface="Fira Code"/>
+              <a:sym typeface="Fira Code"/>
+            </a:endParaRPr>
+          </a:p>
+          <a:p>
+            <a:pPr indent="0" lvl="0" marL="0" rtl="0" algn="l">
+              <a:lnSpc>
+                <a:spcPct val="115000"/>
+              </a:lnSpc>
+              <a:spcBef>
+                <a:spcPts val="0"/>
+              </a:spcBef>
+              <a:spcAft>
+                <a:spcPts val="0"/>
+              </a:spcAft>
+              <a:buNone/>
+            </a:pPr>
+            <a:r>
+              <a:rPr lang="en-US" sz="1350">
+                <a:solidFill>
+                  <a:srgbClr val="32C5F4"/>
+                </a:solidFill>
+                <a:latin typeface="Fira Code"/>
+                <a:ea typeface="Fira Code"/>
+                <a:cs typeface="Fira Code"/>
+                <a:sym typeface="Fira Code"/>
+              </a:rPr>
+              <a:t/>
             </a:r>
             <a:endParaRPr sz="1350">
               <a:solidFill>
@@ -36926,7 +36935,7 @@
                 <a:cs typeface="Inter"/>
                 <a:sym typeface="Inter"/>
               </a:rPr>
-              <a:t>El cuerpo no viaja dentro de corpus.json.</a:t>
+              <a:t>El solapamiento evita perder cifras o condiciones entre cortes.</a:t>
             </a:r>
             <a:endParaRPr>
               <a:solidFill>
@@ -37127,7 +37136,7 @@
                 <a:cs typeface="Inter"/>
                 <a:sym typeface="Inter"/>
               </a:rPr>
-              <a:t>Actualizar con control</a:t>
+              <a:t>Reconstruir y evaluar con control</a:t>
             </a:r>
             <a:endParaRPr b="1" sz="2800">
               <a:solidFill>
@@ -37188,7 +37197,7 @@
                 <a:cs typeface="Inter"/>
                 <a:sym typeface="Inter"/>
               </a:rPr>
-              <a:t>Un texto sintético no puede manchar el temario.</a:t>
+              <a:t>Desde documentos en bruto e índice vacío hasta el test 14 + 6.</a:t>
             </a:r>
             <a:endParaRPr>
               <a:solidFill>
@@ -37421,7 +37430,7 @@
                 <a:cs typeface="Inter"/>
                 <a:sym typeface="Inter"/>
               </a:rPr>
-              <a:t>Aislar</a:t>
+              <a:t>Vaciar</a:t>
             </a:r>
             <a:endParaRPr b="1" sz="1700">
               <a:solidFill>
@@ -37625,7 +37634,7 @@
                 <a:cs typeface="Inter"/>
                 <a:sym typeface="Inter"/>
               </a:rPr>
-              <a:t>Etiquetar</a:t>
+              <a:t>Ingerir</a:t>
             </a:r>
             <a:endParaRPr b="1" sz="1700">
               <a:solidFill>
@@ -37829,7 +37838,7 @@
                 <a:cs typeface="Inter"/>
                 <a:sym typeface="Inter"/>
               </a:rPr>
-              <a:t>Reindexar</a:t>
+              <a:t>Validar</a:t>
             </a:r>
             <a:endParaRPr b="1" sz="1700">
               <a:solidFill>
@@ -38007,7 +38016,7 @@
                 <a:cs typeface="Inter"/>
                 <a:sym typeface="Inter"/>
               </a:rPr>
-              <a:t>Comparar</a:t>
+              <a:t>Evaluar</a:t>
             </a:r>
             <a:endParaRPr b="1" sz="1700">
               <a:solidFill>
@@ -38068,7 +38077,7 @@
                 <a:cs typeface="Inter"/>
                 <a:sym typeface="Inter"/>
               </a:rPr>
-              <a:t>La evaluación reservada no forma parte de la demo.</a:t>
+              <a:t>Validación para calibrar; 20 preguntas reservadas para medir.</a:t>
             </a:r>
             <a:endParaRPr sz="1800">
               <a:solidFill>
@@ -38129,7 +38138,7 @@
                 <a:cs typeface="Fira Code"/>
                 <a:sym typeface="Fira Code"/>
               </a:rPr>
-              <a:t>fixtures/fragmento-sintetico.json</a:t>
+              <a:t>bun run lab:rebuild &amp;&amp; bun run lab:eval</a:t>
             </a:r>
             <a:endParaRPr>
               <a:solidFill>
@@ -38404,7 +38413,7 @@
                 <a:cs typeface="Inter"/>
                 <a:sym typeface="Inter"/>
               </a:rPr>
-              <a:t>No entra en el corpus real</a:t>
+              <a:t>Lectura de vuelta</a:t>
             </a:r>
             <a:endParaRPr sz="1200">
               <a:solidFill>
@@ -38462,7 +38471,7 @@
                 <a:cs typeface="Inter"/>
                 <a:sym typeface="Inter"/>
               </a:rPr>
-              <a:t>Queda marcado como sintético</a:t>
+              <a:t>Sin reajustar con el test</a:t>
             </a:r>
             <a:endParaRPr sz="1200">
               <a:solidFill>
